--- a/slides/decks/s11-invasive-fungal.pptx
+++ b/slides/decks/s11-invasive-fungal.pptx
@@ -133,19 +133,19 @@
   <p:extLst>
     <p:ext uri="{521415D9-36F7-43E2-AB2F-B90AF26B5E84}">
       <p14:sectionLst xmlns:p14="http://schemas.microsoft.com/office/powerpoint/2010/main">
-        <p14:section name="Opening" id="{b0097356-8510-df50-def2-e280f41c70e5}">
+        <p14:section name="Opening" id="{2d444bd0-4648-2c92-c0de-4f948d477209}">
           <p14:sldIdLst>
             <p14:sldId id="256"/>
             <p14:sldId id="257"/>
           </p14:sldIdLst>
         </p14:section>
-        <p14:section name="Epidemiology and risk" id="{c0afa12d-2d2e-ed49-a50a-1899c9863471}">
+        <p14:section name="Epidemiology and risk" id="{33b21737-09e1-95b4-c53d-2cac9652c240}">
           <p14:sldIdLst>
             <p14:sldId id="258"/>
             <p14:sldId id="259"/>
           </p14:sldIdLst>
         </p14:section>
-        <p14:section name="Diagnosis" id="{6fc442fe-f0c3-1ba8-f2dc-c05ec6ef0aa3}">
+        <p14:section name="Diagnosis" id="{d5d3c9d9-df2e-c201-aea1-6281989c2fca}">
           <p14:sldIdLst>
             <p14:sldId id="260"/>
             <p14:sldId id="261"/>
@@ -153,13 +153,13 @@
             <p14:sldId id="263"/>
           </p14:sldIdLst>
         </p14:section>
-        <p14:section name="Prophylaxis" id="{9e097d43-df0b-7679-12c4-7d2e0eda187d}">
+        <p14:section name="Prophylaxis" id="{615f8597-5db9-9b16-4b7d-f24b39376dd9}">
           <p14:sldIdLst>
             <p14:sldId id="264"/>
             <p14:sldId id="265"/>
           </p14:sldIdLst>
         </p14:section>
-        <p14:section name="Treatment" id="{dd72533c-0372-d515-c7fe-26aa22bb2bbe}">
+        <p14:section name="Treatment" id="{914d6914-9b8d-4b44-f568-c437b15d60dc}">
           <p14:sldIdLst>
             <p14:sldId id="266"/>
             <p14:sldId id="267"/>
@@ -169,7 +169,7 @@
             <p14:sldId id="271"/>
           </p14:sldIdLst>
         </p14:section>
-        <p14:section name="Board questions" id="{5a77cccf-bbdd-b8a1-c7d5-64d41bd7ecc9}">
+        <p14:section name="Board questions" id="{279fc595-8f16-d30f-692a-cd6bbc5b9883}">
           <p14:sldIdLst>
             <p14:sldId id="272"/>
             <p14:sldId id="273"/>
@@ -179,13 +179,13 @@
             <p14:sldId id="277"/>
           </p14:sldIdLst>
         </p14:section>
-        <p14:section name="References" id="{76b77c09-d12d-5e56-fff6-e867630f50f7}">
+        <p14:section name="References" id="{fea145ac-ada4-71ff-d8b9-cfd83afac3a8}">
           <p14:sldIdLst>
             <p14:sldId id="278"/>
             <p14:sldId id="279"/>
           </p14:sldIdLst>
         </p14:section>
-        <p14:section name="Backup" id="{ce6bba44-e65c-d3a7-412a-0a16c3ec2773}">
+        <p14:section name="Backup" id="{48e92cd0-2ec7-3d61-58cd-6d9c14584f5c}">
           <p14:sldIdLst>
             <p14:sldId id="280"/>
             <p14:sldId id="281"/>
@@ -615,6 +615,17 @@
               <a:t>各位早安，今天是第 11 堂，主題是 invasive fungal diseases，對應 EBMT Handbook 第 37 章。這次單獨一堂，會把 biomarker、分時期的預防和各菌種的首選藥講細一點；發燒的初步處置請參考第 10 堂。最後一樣有三題考題。</a:t>
             </a:r>
           </a:p>
+          <a:p>
+            <a:pPr>
+              <a:spcAft>
+                <a:spcPts val="600"/>
+              </a:spcAft>
+            </a:pPr>
+            <a:r>
+              <a:rPr lang="en-US" dirty="0"/>
+              <a:t>第 10 堂講過的 Gram-negative 菌血症，和今天的 mould infection，是移植早期感染死亡的兩大來源。</a:t>
+            </a:r>
+          </a:p>
         </p:txBody>
       </p:sp>
       <p:sp>
@@ -751,6 +762,28 @@
               <a:t>HEPA 病房可以減少院內吸入孢子，但很多 IFD 發生在出院後的門診期間，這時環境措施就幫不上忙。</a:t>
             </a:r>
           </a:p>
+          <a:p>
+            <a:pPr>
+              <a:spcAft>
+                <a:spcPts val="600"/>
+              </a:spcAft>
+            </a:pPr>
+            <a:r>
+              <a:rPr lang="en-US" dirty="0"/>
+              <a:t>二線藥物只在 TMP/SMX 不耐受或有禁忌時才用，不要一開始就選。真正要記住的是，PJP 預防的時間取決於免疫抑制何時停止，而不是固定日數。</a:t>
+            </a:r>
+          </a:p>
+          <a:p>
+            <a:pPr>
+              <a:spcAft>
+                <a:spcPts val="600"/>
+              </a:spcAft>
+            </a:pPr>
+            <a:r>
+              <a:rPr lang="en-US" dirty="0"/>
+              <a:t>Posaconazole 的 A-I 是整章唯一一個 A-I 的預防建議，這也是它常被拿來出題的原因。</a:t>
+            </a:r>
+          </a:p>
         </p:txBody>
       </p:sp>
       <p:sp>
@@ -876,6 +909,28 @@
               <a:t>Directed therapy 則用在 proven 或 probable IFD，藥物依菌種決定，接下來幾張一一整理。</a:t>
             </a:r>
           </a:p>
+          <a:p>
+            <a:pPr>
+              <a:spcAft>
+                <a:spcPts val="600"/>
+              </a:spcAft>
+            </a:pPr>
+            <a:r>
+              <a:rPr lang="en-US" dirty="0"/>
+              <a:t>三種策略的差別，在於啟動治療的扳機是發燒、biomarker 或影像，還是確定診斷。</a:t>
+            </a:r>
+          </a:p>
+          <a:p>
+            <a:pPr>
+              <a:spcAft>
+                <a:spcPts val="600"/>
+              </a:spcAft>
+            </a:pPr>
+            <a:r>
+              <a:rPr lang="en-US" dirty="0"/>
+              <a:t>各醫院能做到的檢驗頻率不同，自己的醫院能不能每週兩次驗 biomarker、隨時排到 CT，決定了比較適合哪一種策略。</a:t>
+            </a:r>
+          </a:p>
         </p:txBody>
       </p:sp>
       <p:sp>
@@ -1012,6 +1067,28 @@
               <a:t>Conventional amphotericin B deoxycholate 是 A-I 反對使用，效果較差、毒性較高。</a:t>
             </a:r>
           </a:p>
+          <a:p>
+            <a:pPr>
+              <a:spcAft>
+                <a:spcPts val="600"/>
+              </a:spcAft>
+            </a:pPr>
+            <a:r>
+              <a:rPr lang="en-US" dirty="0"/>
+              <a:t>臨床上選藥時，先看病人正在用的預防藥。若已經在 posaconazole 或 voriconazole 預防下突破感染，就要考慮 liposomal amphotericin B，並檢查濃度和藥敏。若是腦部病灶，選 voriconazole 或 isavuconazole，避開 CNS 穿透差的 posaconazole。考題通常給一個情境，要你從這幾點去判斷。</a:t>
+            </a:r>
+          </a:p>
+          <a:p>
+            <a:pPr>
+              <a:spcAft>
+                <a:spcPts val="600"/>
+              </a:spcAft>
+            </a:pPr>
+            <a:r>
+              <a:rPr lang="en-US" dirty="0"/>
+              <a:t>Isavuconazole 不必依體重計算劑量，這一點從表上的劑量寫法就看得出來。</a:t>
+            </a:r>
+          </a:p>
         </p:txBody>
       </p:sp>
       <p:sp>
@@ -1137,6 +1214,17 @@
               <a:t>Salvage therapy 不論用哪一種藥，global response 只有 40% 左右，所以第一線就選對藥最重要。</a:t>
             </a:r>
           </a:p>
+          <a:p>
+            <a:pPr>
+              <a:spcAft>
+                <a:spcPts val="600"/>
+              </a:spcAft>
+            </a:pPr>
+            <a:r>
+              <a:rPr lang="en-US" dirty="0"/>
+              <a:t>換藥時機目前有專家共識可以參考，原則是不要只憑第一週的影像就判定失敗，要合併臨床、GM 趨勢和藥物濃度一起看。</a:t>
+            </a:r>
+          </a:p>
         </p:txBody>
       </p:sp>
       <p:sp>
@@ -1251,6 +1339,28 @@
               <a:t>Hyalohyphomycosis 是一群異質的黴菌。Fusariosis 第一線用 voriconazole，能清創就清創，posaconazole 當 salvage。Scedosporium 也用 voriconazole，但 Lomentospora prolificans 目前沒有標準治療。Acremonium 和 Scopulariopsis 的最佳治療還沒有定論。新藥 olorofim 對這些難治的黴菌活性很好，包括 Lomentospora，正在後期試驗。</a:t>
             </a:r>
           </a:p>
+          <a:p>
+            <a:pPr>
+              <a:spcAft>
+                <a:spcPts val="600"/>
+              </a:spcAft>
+            </a:pPr>
+            <a:r>
+              <a:rPr lang="en-US" dirty="0"/>
+              <a:t>Mucormycosis 的考點是兩件事，第一線是 lipid amphotericin B 加清創，而 posaconazole、isavuconazole 是穩定後的口服接續，不是起始治療。Fusariosis 則是 voriconazole。</a:t>
+            </a:r>
+          </a:p>
+          <a:p>
+            <a:pPr>
+              <a:spcAft>
+                <a:spcPts val="600"/>
+              </a:spcAft>
+            </a:pPr>
+            <a:r>
+              <a:rPr lang="en-US" dirty="0"/>
+              <a:t>也要注意，GM 測不到 Mucorales，所以 mucormycosis 的診斷常要靠影像和組織，臨床懷疑時不要因為抗原陰性就延誤治療。</a:t>
+            </a:r>
+          </a:p>
         </p:txBody>
       </p:sp>
       <p:sp>
@@ -1376,6 +1486,28 @@
               <a:t>PJP 的治療是高劑量 TMP/SMX 三週，替代是 primaquine 加 clindamycin，治療完要接 secondary prophylaxis。要不要加類固醇，書上說個案決定。</a:t>
             </a:r>
           </a:p>
+          <a:p>
+            <a:pPr>
+              <a:spcAft>
+                <a:spcPts val="600"/>
+              </a:spcAft>
+            </a:pPr>
+            <a:r>
+              <a:rPr lang="en-US" dirty="0"/>
+              <a:t>病房裡常見的錯誤，是 candidemia 的病人退燒後就停藥，或者導管捨不得拔。書上在拔管的建議裡，特別點名 C. parapsilosis 菌血症。在台灣這類亞洲中心，C. parapsilosis 本來就比較常見，這一點對我們特別實用。</a:t>
+            </a:r>
+          </a:p>
+          <a:p>
+            <a:pPr>
+              <a:spcAft>
+                <a:spcPts val="600"/>
+              </a:spcAft>
+            </a:pPr>
+            <a:r>
+              <a:rPr lang="en-US" dirty="0"/>
+              <a:t>Step-down 的前提有兩個，病人臨床穩定，並且已經拿到菌種鑑定和藥敏結果，兩者缺一不可。</a:t>
+            </a:r>
+          </a:p>
         </p:txBody>
       </p:sp>
       <p:sp>
@@ -1501,6 +1633,28 @@
               <a:t>這三組數字很容易出成選擇題。病房裡病人在 posaconazole 預防下突破感染時，先查濃度，再判斷是藥物失敗還是吸收不足。</a:t>
             </a:r>
           </a:p>
+          <a:p>
+            <a:pPr>
+              <a:spcAft>
+                <a:spcPts val="600"/>
+              </a:spcAft>
+            </a:pPr>
+            <a:r>
+              <a:rPr lang="en-US" dirty="0"/>
+              <a:t>記法上，voriconazole 範圍最寬，1 到 6；isavuconazole 窄一點，2 到 4；posaconazole 看用途，治療的目標比預防高。</a:t>
+            </a:r>
+          </a:p>
+          <a:p>
+            <a:pPr>
+              <a:spcAft>
+                <a:spcPts val="600"/>
+              </a:spcAft>
+            </a:pPr>
+            <a:r>
+              <a:rPr lang="en-US" dirty="0"/>
+              <a:t>在 GVHD 加上 posaconazole 預防的病人，若出現突破性感染，先確認濃度是否大於 0.7 mg/L，再決定下一步。Voriconazole 則要讓濃度落在 1 到 6 之間，太低或太高都需要調整劑量。</a:t>
+            </a:r>
+          </a:p>
         </p:txBody>
       </p:sp>
       <p:sp>
@@ -1626,6 +1780,17 @@
               <a:t>[Pause for answers.]</a:t>
             </a:r>
           </a:p>
+          <a:p>
+            <a:pPr>
+              <a:spcAft>
+                <a:spcPts val="600"/>
+              </a:spcAft>
+            </a:pPr>
+            <a:r>
+              <a:rPr lang="en-US" dirty="0"/>
+              <a:t>請先判斷她現在處在哪一個風險時期，再想 ECIL 在這個時期的建議。給大家半分鐘。</a:t>
+            </a:r>
+          </a:p>
         </p:txBody>
       </p:sp>
       <p:sp>
@@ -1740,6 +1905,17 @@
               <a:t>A 是主要陷阱。加驗 GM 的 mould-directed 策略，是給 pre-engraftment、低 mould 發生率的中心用的，不適用於 high-risk GVHD。C 和 D 的資料都來自 pre-engraftment 時期，micafungin 在高 mould 中心只有 C-I。E 停掉預防更不對，ECIL 對這個時期是強烈建議預防。</a:t>
             </a:r>
           </a:p>
+          <a:p>
+            <a:pPr>
+              <a:spcAft>
+                <a:spcPts val="600"/>
+              </a:spcAft>
+            </a:pPr>
+            <a:r>
+              <a:rPr lang="en-US" dirty="0"/>
+              <a:t>這題的關鍵是時間點，同樣是 fluconazole，在 day 10 和 day 38 合併 GVHD 時，答案完全不同。</a:t>
+            </a:r>
+          </a:p>
         </p:txBody>
       </p:sp>
       <p:sp>
@@ -1865,6 +2041,17 @@
               <a:t>[Pause for answers.]</a:t>
             </a:r>
           </a:p>
+          <a:p>
+            <a:pPr>
+              <a:spcAft>
+                <a:spcPts val="600"/>
+              </a:spcAft>
+            </a:pPr>
+            <a:r>
+              <a:rPr lang="en-US" dirty="0"/>
+              <a:t>請注意影像上的特徵，以及兩種抗原陰性代表什麼意義，再決定第一線治療。這題也牽涉到 voriconazole 預防下的突破感染，想一下哪一類黴菌不受影響。給大家半分鐘。</a:t>
+            </a:r>
+          </a:p>
         </p:txBody>
       </p:sp>
       <p:sp>
@@ -2001,6 +2188,28 @@
               <a:t>最後一段是治療，包括 empirical、pre-emptive 和 directed 三種策略，各菌種的首選藥，以及 azole 的 TDM 目標，再用三題考題收尾。</a:t>
             </a:r>
           </a:p>
+          <a:p>
+            <a:pPr>
+              <a:spcAft>
+                <a:spcPts val="600"/>
+              </a:spcAft>
+            </a:pPr>
+            <a:r>
+              <a:rPr lang="en-US" dirty="0"/>
+              <a:t>每一段的最後，我會指出這一部分最常出題的地方。</a:t>
+            </a:r>
+          </a:p>
+          <a:p>
+            <a:pPr>
+              <a:spcAft>
+                <a:spcPts val="600"/>
+              </a:spcAft>
+            </a:pPr>
+            <a:r>
+              <a:rPr lang="en-US" dirty="0"/>
+              <a:t>Haplo 和 cord blood 病人越來越多，這一堂的內容在病房天天用得到。</a:t>
+            </a:r>
+          </a:p>
         </p:txBody>
       </p:sp>
       <p:sp>
@@ -2115,6 +2324,17 @@
               <a:t>Mucormycosis 的第一線是 lipid-based amphotericin B，5 到 10 mg/kg，加上外科清創和控制基礎疾病。A 是主要陷阱，isavuconazole 和 posaconazole 只在病情穩定後當口服的後續治療，不是第一線。C 和 E 的 echinocandin 都不是 mucormycosis 的治療。</a:t>
             </a:r>
           </a:p>
+          <a:p>
+            <a:pPr>
+              <a:spcAft>
+                <a:spcPts val="600"/>
+              </a:spcAft>
+            </a:pPr>
+            <a:r>
+              <a:rPr lang="en-US" dirty="0"/>
+              <a:t>這個病人是在 voriconazole 預防下突破感染，影像又是 reversed halo，抗原全陰性，三個線索都指向 Mucorales。臨床上遇到這種組合，除了開 lipid amphotericin B，也要盡快會診耳鼻喉科或外科評估清創，並且盡量取組織做病理和培養，才能確定診斷和做藥敏。</a:t>
+            </a:r>
+          </a:p>
         </p:txBody>
       </p:sp>
       <p:sp>
@@ -2240,6 +2460,28 @@
               <a:t>[Pause for answers.]</a:t>
             </a:r>
           </a:p>
+          <a:p>
+            <a:pPr>
+              <a:spcAft>
+                <a:spcPts val="600"/>
+              </a:spcAft>
+            </a:pPr>
+            <a:r>
+              <a:rPr lang="en-US" dirty="0"/>
+              <a:t>請想一下藥物選擇、導管處理和療程長度三件事。給大家半分鐘。</a:t>
+            </a:r>
+          </a:p>
+          <a:p>
+            <a:pPr>
+              <a:spcAft>
+                <a:spcPts val="600"/>
+              </a:spcAft>
+            </a:pPr>
+            <a:r>
+              <a:rPr lang="en-US" dirty="0"/>
+              <a:t>也留意菌種，不是 C. albicans。</a:t>
+            </a:r>
+          </a:p>
         </p:txBody>
       </p:sp>
       <p:sp>
@@ -2354,6 +2596,17 @@
               <a:t>A 不對，N. glabrata 常常對 fluconazole 抗藥，而且病人就是在 fluconazole 預防下突破感染的。C 是主要陷阱，留著導管、用 neutrophil 恢復決定停藥，都不符合書上的建議。D 的劑量是 empirical 的做法，不是 documented candidemia 的治療。E 的 6 到 12 週是 aspergillosis 的療程。</a:t>
             </a:r>
           </a:p>
+          <a:p>
+            <a:pPr>
+              <a:spcAft>
+                <a:spcPts val="600"/>
+              </a:spcAft>
+            </a:pPr>
+            <a:r>
+              <a:rPr lang="en-US" dirty="0"/>
+              <a:t>拿到藥敏之後，若菌株敏感、病人臨床穩定，可以依書上的 step-down 原則改成口服藥。</a:t>
+            </a:r>
+          </a:p>
         </p:txBody>
       </p:sp>
       <p:sp>
@@ -2945,6 +3198,17 @@
               <a:t>Proven 或 probable IFD 是 allo-HCT 後一年死亡的獨立預測因子。Aspergillus、Candida 和 Pneumocystis 加起來，佔移植後 IFD 將近 90%。</a:t>
             </a:r>
           </a:p>
+          <a:p>
+            <a:pPr>
+              <a:spcAft>
+                <a:spcPts val="600"/>
+              </a:spcAft>
+            </a:pPr>
+            <a:r>
+              <a:rPr lang="en-US" dirty="0"/>
+              <a:t>這張表的考點有兩個。一是 donor 類型和 IFD 風險的排序，unrelated、mismatched、haplo、cord blood 高，autologous 很低；二是 fluconazole 預防之後 candidemia 雖然變少，一旦發生仍然影響 NRM 和 OS。臨床上，做 haplo 或 cord blood 的病人，抗黴菌預防和監測都要更積極。</a:t>
+            </a:r>
+          </a:p>
         </p:txBody>
       </p:sp>
       <p:sp>
@@ -3081,6 +3345,17 @@
               <a:t>CAR-T 病人另外看。輸注後 60 天內，需要機械通氣、高級別 CRS 和長時間淋巴球低下是主要危險因子。不過在 CAR-T 病人，IFD 並不是一年內死亡的危險因子，這點和 allo-HCT 不同。</a:t>
             </a:r>
           </a:p>
+          <a:p>
+            <a:pPr>
+              <a:spcAft>
+                <a:spcPts val="600"/>
+              </a:spcAft>
+            </a:pPr>
+            <a:r>
+              <a:rPr lang="en-US" dirty="0"/>
+              <a:t>這張圖的用處，是讓大家看到發燒的病人時，先想他在第幾個時期，再推測最可能的菌種和該用的預防藥。</a:t>
+            </a:r>
+          </a:p>
         </p:txBody>
       </p:sp>
       <p:sp>
@@ -3228,6 +3503,28 @@
               <a:t>GM 會和 Fusarium、Penicillium、Histoplasma 等交叉反應，但偵測不到 Mucorales。GM 陰性不能排除 mucormycosis。</a:t>
             </a:r>
           </a:p>
+          <a:p>
+            <a:pPr>
+              <a:spcAft>
+                <a:spcPts val="600"/>
+              </a:spcAft>
+            </a:pPr>
+            <a:r>
+              <a:rPr lang="en-US" dirty="0"/>
+              <a:t>病房裡，GM 單次 0.6 這種數字最常讓人猶豫。依 ECIL 的定義，單次 0.6 還不算陽性，要隔一兩天再驗一次，若仍在 0.5 以上，就符合連續兩次的定義。</a:t>
+            </a:r>
+          </a:p>
+          <a:p>
+            <a:pPr>
+              <a:spcAft>
+                <a:spcPts val="600"/>
+              </a:spcAft>
+            </a:pPr>
+            <a:r>
+              <a:rPr lang="en-US" dirty="0"/>
+              <a:t>反過來，若病人 GM 一路陰性但 CT 有典型病灶，就要想到偽陰性或 Mucorales，下一張會整理。</a:t>
+            </a:r>
+          </a:p>
         </p:txBody>
       </p:sp>
       <p:sp>
@@ -3364,6 +3661,28 @@
               <a:t>兩者都測不到 Mucorales，BDG 也測不到部分 Cryptococcus。</a:t>
             </a:r>
           </a:p>
+          <a:p>
+            <a:pPr>
+              <a:spcAft>
+                <a:spcPts val="600"/>
+              </a:spcAft>
+            </a:pPr>
+            <a:r>
+              <a:rPr lang="en-US" dirty="0"/>
+              <a:t>考題常把這張表倒過來問，例如某位病人 GM 陽性但 CT 正常，下列哪一項可能造成偽陽性。答案通常就在 Fresenius Kabi 血品、gluconate 或腸道 GVHD 這幾項裡面。</a:t>
+            </a:r>
+          </a:p>
+          <a:p>
+            <a:pPr>
+              <a:spcAft>
+                <a:spcPts val="600"/>
+              </a:spcAft>
+            </a:pPr>
+            <a:r>
+              <a:rPr lang="en-US" dirty="0"/>
+              <a:t>遇到這些情況，處理方式是重驗、送 BAL，並把 CT 結果一起判讀，不要單憑一個數值就開始或停止治療。</a:t>
+            </a:r>
+          </a:p>
         </p:txBody>
       </p:sp>
       <p:sp>
@@ -3500,6 +3819,28 @@
               <a:t>PJP 的部分，immunofluorescence 是最敏感的顯微鏡方法。BAL 的 real-time PCR 陰性可以排除 PJP，陽性則可能只是 colonisation，要配合臨床。Serum BDG 陽性可以輔助診斷，但也有偽陰性，而且其他黴菌也會陽性。</a:t>
             </a:r>
           </a:p>
+          <a:p>
+            <a:pPr>
+              <a:spcAft>
+                <a:spcPts val="600"/>
+              </a:spcAft>
+            </a:pPr>
+            <a:r>
+              <a:rPr lang="en-US" dirty="0"/>
+              <a:t>整理起來，BDG 和 PCR 的強項是陰性時幫忙排除，陽性時要配合影像和臨床。Candida 靠培養和 T2Candida，Cryptococcus 靠抗原，PJP 則靠 BAL 的 immunofluorescence 和 PCR。考題常問的是哪一項檢查陰性可以排除 PJP，答案是 BAL 的 real-time PCR。</a:t>
+            </a:r>
+          </a:p>
+          <a:p>
+            <a:pPr>
+              <a:spcAft>
+                <a:spcPts val="600"/>
+              </a:spcAft>
+            </a:pPr>
+            <a:r>
+              <a:rPr lang="en-US" dirty="0"/>
+              <a:t>T2Candida 的 NPV 接近 100%，前提是盛行率在 5 到 10% 之間，題目若換成盛行率很高的族群，這個數字就不能直接套用。</a:t>
+            </a:r>
+          </a:p>
         </p:txBody>
       </p:sp>
       <p:sp>
@@ -3636,6 +3977,28 @@
               <a:t>FDG PET/CT 在複雜感染的診斷和追蹤上，角色也越來越多。</a:t>
             </a:r>
           </a:p>
+          <a:p>
+            <a:pPr>
+              <a:spcAft>
+                <a:spcPts val="600"/>
+              </a:spcAft>
+            </a:pPr>
+            <a:r>
+              <a:rPr lang="en-US" dirty="0"/>
+              <a:t>Air crescent 這一點容易被誤解。它常在 neutrophil 回升時出現，影像看起來像空洞變大，但代表的是宿主免疫恢復，不是治療失敗。這個觀念和下一段提到的第一週病灶變大，可以一起記。</a:t>
+            </a:r>
+          </a:p>
+          <a:p>
+            <a:pPr>
+              <a:spcAft>
+                <a:spcPts val="600"/>
+              </a:spcAft>
+            </a:pPr>
+            <a:r>
+              <a:rPr lang="en-US" dirty="0"/>
+              <a:t>Halo sign 消失得快，所以高風險病人發燒持續，就應該盡早安排 CT，而不是等胸部 X 光有變化。</a:t>
+            </a:r>
+          </a:p>
         </p:txBody>
       </p:sp>
       <p:sp>
@@ -3770,6 +4133,28 @@
             <a:r>
               <a:rPr lang="en-US" dirty="0"/>
               <a:t>Aerosolised liposomal amphotericin B 加 fluconazole，在高風險中心是 B-II，IV liposomal amphotericin B 則是 C-II。</a:t>
+            </a:r>
+          </a:p>
+          <a:p>
+            <a:pPr>
+              <a:spcAft>
+                <a:spcPts val="600"/>
+              </a:spcAft>
+            </a:pPr>
+            <a:r>
+              <a:rPr lang="en-US" dirty="0"/>
+              <a:t>考試常問的是條件，fluconazole 不是不能用，而是只能用在低 mould 發生率、而且有 mould-directed 監測的中心。</a:t>
+            </a:r>
+          </a:p>
+          <a:p>
+            <a:pPr>
+              <a:spcAft>
+                <a:spcPts val="600"/>
+              </a:spcAft>
+            </a:pPr>
+            <a:r>
+              <a:rPr lang="en-US" dirty="0"/>
+              <a:t>這張表的劑量裡，posaconazole 的 loading 和 micafungin 的 50 mg 最常被考，fluconazole 的 5% 門檻也要記住。</a:t>
             </a:r>
           </a:p>
         </p:txBody>

--- a/slides/decks/s11-invasive-fungal.pptx
+++ b/slides/decks/s11-invasive-fungal.pptx
@@ -32,9 +32,10 @@
     <p:sldId id="280" r:id="rId26"/>
     <p:sldId id="281" r:id="rId27"/>
     <p:sldId id="282" r:id="rId28"/>
+    <p:sldId id="283" r:id="rId29"/>
   </p:sldIdLst>
   <p:notesMasterIdLst>
-    <p:notesMasterId r:id="rId29"/>
+    <p:notesMasterId r:id="rId30"/>
   </p:notesMasterIdLst>
   <p:sldSz cx="12192000" cy="6858000"/>
   <p:notesSz cx="6858000" cy="12192000"/>
@@ -133,19 +134,19 @@
   <p:extLst>
     <p:ext uri="{521415D9-36F7-43E2-AB2F-B90AF26B5E84}">
       <p14:sectionLst xmlns:p14="http://schemas.microsoft.com/office/powerpoint/2010/main">
-        <p14:section name="Opening" id="{2d444bd0-4648-2c92-c0de-4f948d477209}">
+        <p14:section name="Opening" id="{50f1baf0-aa58-2af2-cbbc-4d85dbd7d487}">
           <p14:sldIdLst>
             <p14:sldId id="256"/>
             <p14:sldId id="257"/>
           </p14:sldIdLst>
         </p14:section>
-        <p14:section name="Epidemiology and risk" id="{33b21737-09e1-95b4-c53d-2cac9652c240}">
+        <p14:section name="Epidemiology and risk" id="{0d69ee49-a3b6-365a-2c5a-9e24a6e1ab24}">
           <p14:sldIdLst>
             <p14:sldId id="258"/>
             <p14:sldId id="259"/>
           </p14:sldIdLst>
         </p14:section>
-        <p14:section name="Diagnosis" id="{d5d3c9d9-df2e-c201-aea1-6281989c2fca}">
+        <p14:section name="Diagnosis" id="{61f26891-3aa5-d1cf-fbb7-1a49196cd3a1}">
           <p14:sldIdLst>
             <p14:sldId id="260"/>
             <p14:sldId id="261"/>
@@ -153,13 +154,13 @@
             <p14:sldId id="263"/>
           </p14:sldIdLst>
         </p14:section>
-        <p14:section name="Prophylaxis" id="{615f8597-5db9-9b16-4b7d-f24b39376dd9}">
+        <p14:section name="Prophylaxis" id="{8c3620f3-3621-516f-7674-4841db47a3a8}">
           <p14:sldIdLst>
             <p14:sldId id="264"/>
             <p14:sldId id="265"/>
           </p14:sldIdLst>
         </p14:section>
-        <p14:section name="Treatment" id="{914d6914-9b8d-4b44-f568-c437b15d60dc}">
+        <p14:section name="Treatment" id="{df3c4962-0a14-f370-1f72-7e9caf30d78f}">
           <p14:sldIdLst>
             <p14:sldId id="266"/>
             <p14:sldId id="267"/>
@@ -169,7 +170,7 @@
             <p14:sldId id="271"/>
           </p14:sldIdLst>
         </p14:section>
-        <p14:section name="Board questions" id="{279fc595-8f16-d30f-692a-cd6bbc5b9883}">
+        <p14:section name="Board questions" id="{3cb4aa71-1c79-7a19-d88b-246a99e4ab90}">
           <p14:sldIdLst>
             <p14:sldId id="272"/>
             <p14:sldId id="273"/>
@@ -179,17 +180,18 @@
             <p14:sldId id="277"/>
           </p14:sldIdLst>
         </p14:section>
-        <p14:section name="References" id="{fea145ac-ada4-71ff-d8b9-cfd83afac3a8}">
+        <p14:section name="References" id="{711679eb-e27f-7015-0a82-8db232a513eb}">
           <p14:sldIdLst>
             <p14:sldId id="278"/>
             <p14:sldId id="279"/>
+            <p14:sldId id="280"/>
           </p14:sldIdLst>
         </p14:section>
-        <p14:section name="Backup" id="{48e92cd0-2ec7-3d61-58cd-6d9c14584f5c}">
+        <p14:section name="Backup" id="{f821d6f1-52d7-b997-04dc-54a6889666ae}">
           <p14:sldIdLst>
-            <p14:sldId id="280"/>
             <p14:sldId id="281"/>
             <p14:sldId id="282"/>
+            <p14:sldId id="283"/>
           </p14:sldIdLst>
         </p14:section>
       </p14:sectionLst>
@@ -1225,6 +1227,17 @@
               <a:t>換藥時機目前有專家共識可以參考，原則是不要只憑第一週的影像就判定失敗，要合併臨床、GM 趨勢和藥物濃度一起看。</a:t>
             </a:r>
           </a:p>
+          <a:p>
+            <a:pPr>
+              <a:spcAft>
+                <a:spcPts val="600"/>
+              </a:spcAft>
+            </a:pPr>
+            <a:r>
+              <a:rPr lang="en-US" dirty="0"/>
+              <a:t>這三點合起來，就是不要太早換藥，也不要太早停藥。</a:t>
+            </a:r>
+          </a:p>
         </p:txBody>
       </p:sp>
       <p:sp>
@@ -2865,26 +2878,11 @@
           <a:bodyPr/>
           <a:lstStyle/>
           <a:p>
-            <a:pPr>
-              <a:spcAft>
-                <a:spcPts val="600"/>
-              </a:spcAft>
-            </a:pPr>
             <a:r>
               <a:rPr lang="en-US" dirty="0"/>
-              <a:t>這是 Table 37.2 中 voriconazole、isavuconazole 以外的部分。Aspergillosis 用 liposomal amphotericin B 3 mg/kg 是 B-I，mucormycosis 則是 5 mg/kg，B-II。</a:t>
-            </a:r>
-          </a:p>
-          <a:p>
-            <a:pPr>
-              <a:spcAft>
-                <a:spcPts val="600"/>
-              </a:spcAft>
-            </a:pPr>
-            <a:r>
-              <a:rPr lang="en-US" dirty="0"/>
-              <a:t>Posaconazole 治療 aspergillosis 是 2021 年試驗之後才加入的，所以不在 ECIL-6 表內。</a:t>
-            </a:r>
+              <a:t>各頁頁尾短式引用的完整文獻，不講。</a:t>
+            </a:r>
+            <a:endParaRPr lang="en-US" dirty="0"/>
           </a:p>
         </p:txBody>
       </p:sp>
@@ -2968,11 +2966,26 @@
           <a:bodyPr/>
           <a:lstStyle/>
           <a:p>
+            <a:pPr>
+              <a:spcAft>
+                <a:spcPts val="600"/>
+              </a:spcAft>
+            </a:pPr>
             <a:r>
               <a:rPr lang="en-US" dirty="0"/>
-              <a:t>這張補充 pre-engraftment 預防各藥等級背後的試驗。Voriconazole 對 itraconazole 的優勢來自能用得比較久，不是效果較好；micafungin 的試驗低風險病人太多，所以高 mould 中心只給 C-I。</a:t>
-            </a:r>
-            <a:endParaRPr lang="en-US" dirty="0"/>
+              <a:t>這是 Table 37.2 中 voriconazole、isavuconazole 以外的部分。Aspergillosis 用 liposomal amphotericin B 3 mg/kg 是 B-I，mucormycosis 則是 5 mg/kg，B-II。</a:t>
+            </a:r>
+          </a:p>
+          <a:p>
+            <a:pPr>
+              <a:spcAft>
+                <a:spcPts val="600"/>
+              </a:spcAft>
+            </a:pPr>
+            <a:r>
+              <a:rPr lang="en-US" dirty="0"/>
+              <a:t>Posaconazole 治療 aspergillosis 是 2021 年試驗之後才加入的，所以不在 ECIL-6 表內。</a:t>
+            </a:r>
           </a:p>
         </p:txBody>
       </p:sp>
@@ -3058,7 +3071,7 @@
           <a:p>
             <a:r>
               <a:rPr lang="en-US" dirty="0"/>
-              <a:t>書上 key point 列出三個新藥。Rezafungin 是長效 echinocandin，研究用在預防；olorofim 用於治療選擇有限的 mould，但不含 Mucorales；opelconazole 是吸入型 azole，當 salvage 的輔助。</a:t>
+              <a:t>這張補充 pre-engraftment 預防各藥等級背後的試驗。Voriconazole 對 itraconazole 的優勢來自能用得比較久，不是效果較好；micafungin 的試驗低風險病人太多，所以高 mould 中心只給 C-I。</a:t>
             </a:r>
             <a:endParaRPr lang="en-US" dirty="0"/>
           </a:p>
@@ -3082,6 +3095,94 @@
             <a:fld id="{F7021451-1387-4CA6-816F-3879F97B5CBC}" type="slidenum">
               <a:rPr lang="en-US"/>
               <a:t>27</a:t>
+            </a:fld>
+            <a:endParaRPr lang="en-US"/>
+          </a:p>
+        </p:txBody>
+      </p:sp>
+    </p:spTree>
+    <p:extLst>
+      <p:ext uri="{BB962C8B-B14F-4D97-AF65-F5344CB8AC3E}">
+        <p14:creationId xmlns:p14="http://schemas.microsoft.com/office/powerpoint/2010/main" val="1024086991"/>
+      </p:ext>
+    </p:extLst>
+  </p:cSld>
+  <p:clrMapOvr>
+    <a:masterClrMapping/>
+  </p:clrMapOvr>
+</p:notes>
+</file>
+
+<file path=ppt/notesSlides/notesSlide28.xml><?xml version="1.0" encoding="utf-8"?>
+<p:notes xmlns:a="http://schemas.openxmlformats.org/drawingml/2006/main" xmlns:r="http://schemas.openxmlformats.org/officeDocument/2006/relationships" xmlns:p="http://schemas.openxmlformats.org/presentationml/2006/main">
+  <p:cSld>
+    <p:spTree>
+      <p:nvGrpSpPr>
+        <p:cNvPr id="1" name=""/>
+        <p:cNvGrpSpPr/>
+        <p:nvPr/>
+      </p:nvGrpSpPr>
+      <p:grpSpPr>
+        <a:xfrm>
+          <a:off x="0" y="0"/>
+          <a:ext cx="0" cy="0"/>
+          <a:chOff x="0" y="0"/>
+          <a:chExt cx="0" cy="0"/>
+        </a:xfrm>
+      </p:grpSpPr>
+      <p:sp>
+        <p:nvSpPr>
+          <p:cNvPr id="2" name="Slide Image Placeholder 1"/>
+          <p:cNvSpPr>
+            <a:spLocks noGrp="1" noRot="1" noChangeAspect="1"/>
+          </p:cNvSpPr>
+          <p:nvPr>
+            <p:ph type="sldImg"/>
+          </p:nvPr>
+        </p:nvSpPr>
+        <p:spPr/>
+      </p:sp>
+      <p:sp>
+        <p:nvSpPr>
+          <p:cNvPr id="3" name="Notes Placeholder 2"/>
+          <p:cNvSpPr>
+            <a:spLocks noGrp="1"/>
+          </p:cNvSpPr>
+          <p:nvPr>
+            <p:ph type="body" idx="1"/>
+          </p:nvPr>
+        </p:nvSpPr>
+        <p:spPr/>
+        <p:txBody>
+          <a:bodyPr/>
+          <a:lstStyle/>
+          <a:p>
+            <a:r>
+              <a:rPr lang="en-US" dirty="0"/>
+              <a:t>書上 key point 列出三個新藥。Rezafungin 是長效 echinocandin，研究用在預防；olorofim 用於治療選擇有限的 mould，但不含 Mucorales；opelconazole 是吸入型 azole，當 salvage 的輔助。</a:t>
+            </a:r>
+            <a:endParaRPr lang="en-US" dirty="0"/>
+          </a:p>
+        </p:txBody>
+      </p:sp>
+      <p:sp>
+        <p:nvSpPr>
+          <p:cNvPr id="4" name="Slide Number Placeholder 3"/>
+          <p:cNvSpPr>
+            <a:spLocks noGrp="1"/>
+          </p:cNvSpPr>
+          <p:nvPr>
+            <p:ph type="sldNum" sz="quarter" idx="10"/>
+          </p:nvPr>
+        </p:nvSpPr>
+        <p:spPr/>
+        <p:txBody>
+          <a:bodyPr/>
+          <a:lstStyle/>
+          <a:p>
+            <a:fld id="{F7021451-1387-4CA6-816F-3879F97B5CBC}" type="slidenum">
+              <a:rPr lang="en-US"/>
+              <a:t>28</a:t>
             </a:fld>
             <a:endParaRPr lang="en-US"/>
           </a:p>
@@ -12624,7 +12725,7 @@
                   <a:schemeClr val="tx1"/>
                 </a:solidFill>
               </a:rPr>
-              <a:t>Four parts, from who is at risk to which drug to give</a:t>
+              <a:t>Four parts, from risk to the right antifungal</a:t>
             </a:r>
             <a:endParaRPr lang="en-US" sz="3600" dirty="0"/>
           </a:p>
@@ -13727,7 +13828,7 @@
                   <a:schemeClr val="tx1"/>
                 </a:solidFill>
               </a:rPr>
-              <a:t>Question 3: yeast in the blood during neutropenia</a:t>
+              <a:t>Question 3: candidaemia during neutropenia</a:t>
             </a:r>
             <a:endParaRPr lang="en-US" sz="3600" dirty="0"/>
           </a:p>
@@ -14054,7 +14155,7 @@
                   <a:schemeClr val="tx1"/>
                 </a:solidFill>
               </a:rPr>
-              <a:t>Answer B: echinocandin, remove the line, 14 days</a:t>
+              <a:t>Answer B: echinocandin and catheter removal</a:t>
             </a:r>
             <a:endParaRPr lang="en-US" sz="3600" dirty="0"/>
           </a:p>
@@ -14316,7 +14417,7 @@
                   <a:schemeClr val="tx1"/>
                 </a:solidFill>
               </a:rPr>
-              <a:t>References, part 1 of 2</a:t>
+              <a:t>References, part 1 of 3</a:t>
             </a:r>
             <a:endParaRPr lang="en-US" sz="3600" dirty="0"/>
           </a:p>
@@ -14638,7 +14739,7 @@
                   <a:schemeClr val="tx1"/>
                 </a:solidFill>
               </a:rPr>
-              <a:t>References, part 2 of 2</a:t>
+              <a:t>References, part 2 of 3</a:t>
             </a:r>
             <a:endParaRPr lang="en-US" sz="3600" dirty="0"/>
           </a:p>
@@ -14767,7 +14868,7 @@
                   <a:schemeClr val="tx1"/>
                 </a:solidFill>
               </a:rPr>
-              <a:t>11. Andes DR, Safdar N, Baddley JW, et al. Impact of treatment strategy on outcomes in patients with candidemia and other forms of invasive candidiasis: a patient-level quantitative review of randomized trials. Clin Infect Dis. 2012;54:1110–22.</a:t>
+              <a:t>11. Slavin MA, Chen YC, Cordonnier C, et al. When to change treatment of acute invasive aspergillosis: an expert viewpoint. J Antimicrob Chemother. 2021;77(1):16–23.</a:t>
             </a:r>
             <a:endParaRPr lang="en-US" sz="1100" dirty="0"/>
           </a:p>
@@ -14784,7 +14885,7 @@
                   <a:schemeClr val="tx1"/>
                 </a:solidFill>
               </a:rPr>
-              <a:t>12. Maschmeyer G, Helweg-Larsen J, Pagano L, et al. ECIL guidelines for treatment of pneumocystis jirovecii pneumonia in non-HIV-infected haematology patients. J Antimicrob Chemother. 2016;71:2405–13.</a:t>
+              <a:t>12. Andes DR, Safdar N, Baddley JW, et al. Impact of treatment strategy on outcomes in patients with candidemia and other forms of invasive candidiasis: a patient-level quantitative review of randomized trials. Clin Infect Dis. 2012;54:1110–22.</a:t>
             </a:r>
             <a:endParaRPr lang="en-US" sz="1100" dirty="0"/>
           </a:p>
@@ -14922,7 +15023,7 @@
                   <a:schemeClr val="tx1"/>
                 </a:solidFill>
               </a:rPr>
-              <a:t>BACKUP · BACKUP · TABLE 37.2</a:t>
+              <a:t>REFERENCES</a:t>
             </a:r>
             <a:endParaRPr lang="en-US" sz="1100" dirty="0"/>
           </a:p>
@@ -14960,7 +15061,7 @@
                   <a:schemeClr val="tx1"/>
                 </a:solidFill>
               </a:rPr>
-              <a:t>ECIL-6 grades the polyenes and second-line options for both moulds</a:t>
+              <a:t>References, part 3 of 3</a:t>
             </a:r>
             <a:endParaRPr lang="en-US" sz="3600" dirty="0"/>
           </a:p>
@@ -14968,7 +15069,46 @@
       </p:sp>
       <p:sp>
         <p:nvSpPr>
-          <p:cNvPr id="4" name="Text 0"/>
+          <p:cNvPr id="5" name="Text 83"/>
+          <p:cNvSpPr txBox="1"/>
+          <p:nvPr/>
+        </p:nvSpPr>
+        <p:spPr>
+          <a:xfrm>
+            <a:off x="685800" y="2103120"/>
+            <a:ext cx="5120640" cy="3886200"/>
+          </a:xfrm>
+          <a:prstGeom prst="rect">
+            <a:avLst/>
+          </a:prstGeom>
+          <a:noFill/>
+          <a:ln/>
+        </p:spPr>
+        <p:txBody>
+          <a:bodyPr wrap="square" lIns="0" tIns="0" rIns="0" bIns="0" rtlCol="0" anchor="t"/>
+          <a:lstStyle/>
+          <a:p>
+            <a:pPr indent="0" marL="0">
+              <a:spcAft>
+                <a:spcPts val="700"/>
+              </a:spcAft>
+              <a:buNone/>
+            </a:pPr>
+            <a:r>
+              <a:rPr lang="en-US" sz="1100" dirty="0">
+                <a:solidFill>
+                  <a:schemeClr val="tx1"/>
+                </a:solidFill>
+              </a:rPr>
+              <a:t>13. Maschmeyer G, Helweg-Larsen J, Pagano L, et al. ECIL guidelines for treatment of pneumocystis jirovecii pneumonia in non-HIV-infected haematology patients. J Antimicrob Chemother. 2016;71:2405–13.</a:t>
+            </a:r>
+            <a:endParaRPr lang="en-US" sz="1100" dirty="0"/>
+          </a:p>
+        </p:txBody>
+      </p:sp>
+      <p:sp>
+        <p:nvSpPr>
+          <p:cNvPr id="6" name="Text 0"/>
           <p:cNvSpPr/>
           <p:nvPr>
             <p:ph idx="102" type="body" hasCustomPrompt="1"/>
@@ -14992,6 +15132,182 @@
             <a:pPr algn="l" indent="0" marL="0">
               <a:buNone/>
             </a:pPr>
+            <a:endParaRPr lang="en-US" sz="1000" dirty="0"/>
+          </a:p>
+        </p:txBody>
+      </p:sp>
+      <p:sp>
+        <p:nvSpPr>
+          <p:cNvPr id="25" name="Slide Number Placeholder 0"/>
+          <p:cNvSpPr>
+            <a:spLocks noGrp="1"/>
+          </p:cNvSpPr>
+          <p:nvPr>
+            <p:ph type="sldNum" sz="quarter" idx="4294967295"/>
+          </p:nvPr>
+        </p:nvSpPr>
+        <p:spPr>
+          <a:xfrm>
+            <a:off x="10972800" y="6080760"/>
+            <a:ext cx="530352" cy="274320"/>
+          </a:xfrm>
+          <a:prstGeom prst="rect">
+            <a:avLst/>
+          </a:prstGeom>
+          <a:extLst>
+            <a:ext uri="{C572A759-6A51-4108-AA02-DFA0A04FC94B}">
+              <ma14:wrappingTextBoxFlag xmlns:ma14="http://schemas.microsoft.com/office/mac/drawingml/2011/main" val="0"/>
+            </a:ext>
+          </a:extLst>
+        </p:spPr>
+        <p:txBody>
+          <a:bodyPr/>
+          <a:lstStyle>
+            <a:lvl1pPr>
+              <a:defRPr sz="1000">
+                <a:solidFill>
+                  <a:schemeClr val="tx1"/>
+                </a:solidFill>
+              </a:defRPr>
+            </a:lvl1pPr>
+          </a:lstStyle>
+          <a:p>
+            <a:pPr algn="r"/>
+            <a:fld id="{F7021451-1387-4CA6-816F-3879F97B5CBC}" type="slidenum">
+              <a:rPr b="0" lang="en-US"/>
+              <a:t>25</a:t>
+            </a:fld>
+            <a:endParaRPr lang="en-US"/>
+          </a:p>
+        </p:txBody>
+      </p:sp>
+    </p:spTree>
+  </p:cSld>
+  <p:clrMapOvr>
+    <a:masterClrMapping/>
+  </p:clrMapOvr>
+</p:sld>
+</file>
+
+<file path=ppt/slides/slide26.xml><?xml version="1.0" encoding="utf-8"?>
+<p:sld xmlns:a="http://schemas.openxmlformats.org/drawingml/2006/main" xmlns:r="http://schemas.openxmlformats.org/officeDocument/2006/relationships" xmlns:p="http://schemas.openxmlformats.org/presentationml/2006/main">
+  <p:cSld name="Slide 26">
+    <p:spTree>
+      <p:nvGrpSpPr>
+        <p:cNvPr id="1" name=""/>
+        <p:cNvGrpSpPr/>
+        <p:nvPr/>
+      </p:nvGrpSpPr>
+      <p:grpSpPr>
+        <a:xfrm>
+          <a:off x="0" y="0"/>
+          <a:ext cx="0" cy="0"/>
+          <a:chOff x="0" y="0"/>
+          <a:chExt cx="0" cy="0"/>
+        </a:xfrm>
+      </p:grpSpPr>
+      <p:sp>
+        <p:nvSpPr>
+          <p:cNvPr id="2" name="Text 0"/>
+          <p:cNvSpPr/>
+          <p:nvPr>
+            <p:ph idx="100" type="body" hasCustomPrompt="1"/>
+          </p:nvPr>
+        </p:nvSpPr>
+        <p:spPr>
+          <a:xfrm>
+            <a:off x="685800" y="502920"/>
+            <a:ext cx="10817352" cy="274320"/>
+          </a:xfrm>
+          <a:prstGeom prst="rect">
+            <a:avLst/>
+          </a:prstGeom>
+          <a:noFill/>
+          <a:ln/>
+        </p:spPr>
+        <p:txBody>
+          <a:bodyPr wrap="square" lIns="0" tIns="0" rIns="0" bIns="0" rtlCol="0" anchor="t"/>
+          <a:lstStyle/>
+          <a:p>
+            <a:pPr algn="l" indent="0" marL="0">
+              <a:buNone/>
+            </a:pPr>
+            <a:r>
+              <a:rPr lang="en-US" sz="1100" spc="300" kern="0" dirty="0">
+                <a:solidFill>
+                  <a:schemeClr val="tx1"/>
+                </a:solidFill>
+              </a:rPr>
+              <a:t>BACKUP · TABLE 37.2</a:t>
+            </a:r>
+            <a:endParaRPr lang="en-US" sz="1100" dirty="0"/>
+          </a:p>
+        </p:txBody>
+      </p:sp>
+      <p:sp>
+        <p:nvSpPr>
+          <p:cNvPr id="3" name="Text 0"/>
+          <p:cNvSpPr/>
+          <p:nvPr>
+            <p:ph idx="101" type="title" hasCustomPrompt="1"/>
+          </p:nvPr>
+        </p:nvSpPr>
+        <p:spPr>
+          <a:xfrm>
+            <a:off x="685800" y="822960"/>
+            <a:ext cx="10817352" cy="1143000"/>
+          </a:xfrm>
+          <a:prstGeom prst="rect">
+            <a:avLst/>
+          </a:prstGeom>
+          <a:noFill/>
+          <a:ln/>
+        </p:spPr>
+        <p:txBody>
+          <a:bodyPr wrap="square" lIns="0" tIns="0" rIns="0" bIns="0" rtlCol="0" anchor="t"/>
+          <a:lstStyle/>
+          <a:p>
+            <a:pPr algn="l" indent="0" marL="0">
+              <a:buNone/>
+            </a:pPr>
+            <a:r>
+              <a:rPr lang="en-US" sz="3600" b="1" dirty="0">
+                <a:solidFill>
+                  <a:schemeClr val="tx1"/>
+                </a:solidFill>
+              </a:rPr>
+              <a:t>ECIL-6 grades the polyenes and second-line options for both moulds</a:t>
+            </a:r>
+            <a:endParaRPr lang="en-US" sz="3600" dirty="0"/>
+          </a:p>
+        </p:txBody>
+      </p:sp>
+      <p:sp>
+        <p:nvSpPr>
+          <p:cNvPr id="4" name="Text 0"/>
+          <p:cNvSpPr/>
+          <p:nvPr>
+            <p:ph idx="102" type="body" hasCustomPrompt="1"/>
+          </p:nvPr>
+        </p:nvSpPr>
+        <p:spPr>
+          <a:xfrm>
+            <a:off x="685800" y="6080760"/>
+            <a:ext cx="9966960" cy="457200"/>
+          </a:xfrm>
+          <a:prstGeom prst="rect">
+            <a:avLst/>
+          </a:prstGeom>
+          <a:noFill/>
+          <a:ln/>
+        </p:spPr>
+        <p:txBody>
+          <a:bodyPr wrap="square" lIns="0" tIns="0" rIns="0" bIns="0" rtlCol="0" anchor="t"/>
+          <a:lstStyle/>
+          <a:p>
+            <a:pPr algn="l" indent="0" marL="0">
+              <a:buNone/>
+            </a:pPr>
             <a:r>
               <a:rPr lang="en-US" sz="1000" dirty="0">
                 <a:solidFill>
@@ -15006,7 +15322,7 @@
       </p:sp>
       <p:graphicFrame>
         <p:nvGraphicFramePr>
-          <p:cNvPr id="26" name="Table 83"/>
+          <p:cNvPr id="27" name="Table 84"/>
           <p:cNvGraphicFramePr>
             <a:graphicFrameLocks noGrp="1"/>
           </p:cNvGraphicFramePr>
@@ -15041,14 +15357,14 @@
                         <a:buNone/>
                       </a:pPr>
                       <a:r>
-                        <a:rPr lang="en-US" sz="1500" b="1" dirty="0">
+                        <a:rPr lang="en-US" sz="1400" b="1" dirty="0">
                           <a:solidFill>
                             <a:schemeClr val="tx1"/>
                           </a:solidFill>
                         </a:rPr>
                         <a:t>Drug</a:t>
                       </a:r>
-                      <a:endParaRPr lang="en-US" sz="1500" dirty="0"/>
+                      <a:endParaRPr lang="en-US" sz="1400" dirty="0"/>
                     </a:p>
                   </a:txBody>
                   <a:tcPr marL="25400" marR="101600" marT="63500" marB="63500" anchor="ctr">
@@ -15087,14 +15403,14 @@
                         <a:buNone/>
                       </a:pPr>
                       <a:r>
-                        <a:rPr lang="en-US" sz="1500" b="1" dirty="0">
+                        <a:rPr lang="en-US" sz="1400" b="1" dirty="0">
                           <a:solidFill>
                             <a:schemeClr val="tx1"/>
                           </a:solidFill>
                         </a:rPr>
                         <a:t>Invasive aspergillosis</a:t>
                       </a:r>
-                      <a:endParaRPr lang="en-US" sz="1500" dirty="0"/>
+                      <a:endParaRPr lang="en-US" sz="1400" dirty="0"/>
                     </a:p>
                   </a:txBody>
                   <a:tcPr marL="25400" marR="101600" marT="63500" marB="63500" anchor="ctr">
@@ -15133,14 +15449,14 @@
                         <a:buNone/>
                       </a:pPr>
                       <a:r>
-                        <a:rPr lang="en-US" sz="1500" b="1" dirty="0">
+                        <a:rPr lang="en-US" sz="1400" b="1" dirty="0">
                           <a:solidFill>
                             <a:schemeClr val="tx1"/>
                           </a:solidFill>
                         </a:rPr>
                         <a:t>Mucormycosis</a:t>
                       </a:r>
-                      <a:endParaRPr lang="en-US" sz="1500" dirty="0"/>
+                      <a:endParaRPr lang="en-US" sz="1400" dirty="0"/>
                     </a:p>
                   </a:txBody>
                   <a:tcPr marL="25400" marR="101600" marT="63500" marB="63500" anchor="ctr">
@@ -15181,14 +15497,14 @@
                         <a:buNone/>
                       </a:pPr>
                       <a:r>
-                        <a:rPr lang="en-US" sz="1500" dirty="0">
+                        <a:rPr lang="en-US" sz="1400" dirty="0">
                           <a:solidFill>
                             <a:schemeClr val="tx1"/>
                           </a:solidFill>
                         </a:rPr>
                         <a:t>Liposomal AmB</a:t>
                       </a:r>
-                      <a:endParaRPr lang="en-US" sz="1500" dirty="0"/>
+                      <a:endParaRPr lang="en-US" sz="1400" dirty="0"/>
                     </a:p>
                   </a:txBody>
                   <a:tcPr marL="25400" marR="101600" marT="63500" marB="63500" anchor="ctr">
@@ -15221,14 +15537,14 @@
                         <a:buNone/>
                       </a:pPr>
                       <a:r>
-                        <a:rPr lang="en-US" sz="1500" dirty="0">
+                        <a:rPr lang="en-US" sz="1400" dirty="0">
                           <a:solidFill>
                             <a:schemeClr val="tx1"/>
                           </a:solidFill>
                         </a:rPr>
                         <a:t>B-I; 3 mg/kg/day</a:t>
                       </a:r>
-                      <a:endParaRPr lang="en-US" sz="1500" dirty="0"/>
+                      <a:endParaRPr lang="en-US" sz="1400" dirty="0"/>
                     </a:p>
                   </a:txBody>
                   <a:tcPr marL="25400" marR="101600" marT="63500" marB="63500" anchor="ctr">
@@ -15261,28 +15577,28 @@
                         <a:buNone/>
                       </a:pPr>
                       <a:r>
-                        <a:rPr lang="en-US" sz="1500" dirty="0">
+                        <a:rPr lang="en-US" sz="1400" dirty="0">
                           <a:solidFill>
                             <a:schemeClr val="tx1"/>
                           </a:solidFill>
                         </a:rPr>
                         <a:t>B-II; 5 mg/kg/day; preferred in</a:t>
                       </a:r>
-                      <a:endParaRPr lang="en-US" sz="1500" dirty="0"/>
-                    </a:p>
-                    <a:p>
-                      <a:pPr indent="0" marL="0">
-                        <a:buNone/>
-                      </a:pPr>
-                      <a:r>
-                        <a:rPr lang="en-US" sz="1500" dirty="0">
+                      <a:endParaRPr lang="en-US" sz="1400" dirty="0"/>
+                    </a:p>
+                    <a:p>
+                      <a:pPr indent="0" marL="0">
+                        <a:buNone/>
+                      </a:pPr>
+                      <a:r>
+                        <a:rPr lang="en-US" sz="1400" dirty="0">
                           <a:solidFill>
                             <a:schemeClr val="tx1"/>
                           </a:solidFill>
                         </a:rPr>
                         <a:t>CNS infection or renal failure</a:t>
                       </a:r>
-                      <a:endParaRPr lang="en-US" sz="1500" dirty="0"/>
+                      <a:endParaRPr lang="en-US" sz="1400" dirty="0"/>
                     </a:p>
                   </a:txBody>
                   <a:tcPr marL="25400" marR="101600" marT="63500" marB="63500" anchor="ctr">
@@ -15317,14 +15633,14 @@
                         <a:buNone/>
                       </a:pPr>
                       <a:r>
-                        <a:rPr lang="en-US" sz="1500" dirty="0">
+                        <a:rPr lang="en-US" sz="1400" dirty="0">
                           <a:solidFill>
                             <a:schemeClr val="tx1"/>
                           </a:solidFill>
                         </a:rPr>
                         <a:t>AmB lipid complex</a:t>
                       </a:r>
-                      <a:endParaRPr lang="en-US" sz="1500" dirty="0"/>
+                      <a:endParaRPr lang="en-US" sz="1400" dirty="0"/>
                     </a:p>
                   </a:txBody>
                   <a:tcPr marL="25400" marR="101600" marT="63500" marB="63500" anchor="ctr">
@@ -15357,14 +15673,14 @@
                         <a:buNone/>
                       </a:pPr>
                       <a:r>
-                        <a:rPr lang="en-US" sz="1500" dirty="0">
+                        <a:rPr lang="en-US" sz="1400" dirty="0">
                           <a:solidFill>
                             <a:schemeClr val="tx1"/>
                           </a:solidFill>
                         </a:rPr>
                         <a:t>B-II; 5 mg/kg/day</a:t>
                       </a:r>
-                      <a:endParaRPr lang="en-US" sz="1500" dirty="0"/>
+                      <a:endParaRPr lang="en-US" sz="1400" dirty="0"/>
                     </a:p>
                   </a:txBody>
                   <a:tcPr marL="25400" marR="101600" marT="63500" marB="63500" anchor="ctr">
@@ -15397,14 +15713,14 @@
                         <a:buNone/>
                       </a:pPr>
                       <a:r>
-                        <a:rPr lang="en-US" sz="1500" dirty="0">
+                        <a:rPr lang="en-US" sz="1400" dirty="0">
                           <a:solidFill>
                             <a:schemeClr val="tx1"/>
                           </a:solidFill>
                         </a:rPr>
                         <a:t>B-II</a:t>
                       </a:r>
-                      <a:endParaRPr lang="en-US" sz="1500" dirty="0"/>
+                      <a:endParaRPr lang="en-US" sz="1400" dirty="0"/>
                     </a:p>
                   </a:txBody>
                   <a:tcPr marL="25400" marR="101600" marT="63500" marB="63500" anchor="ctr">
@@ -15439,14 +15755,14 @@
                         <a:buNone/>
                       </a:pPr>
                       <a:r>
-                        <a:rPr lang="en-US" sz="1500" dirty="0">
+                        <a:rPr lang="en-US" sz="1400" dirty="0">
                           <a:solidFill>
                             <a:schemeClr val="tx1"/>
                           </a:solidFill>
                         </a:rPr>
                         <a:t>AmB colloidal dispersion</a:t>
                       </a:r>
-                      <a:endParaRPr lang="en-US" sz="1500" dirty="0"/>
+                      <a:endParaRPr lang="en-US" sz="1400" dirty="0"/>
                     </a:p>
                   </a:txBody>
                   <a:tcPr marL="25400" marR="101600" marT="63500" marB="63500" anchor="ctr">
@@ -15479,28 +15795,28 @@
                         <a:buNone/>
                       </a:pPr>
                       <a:r>
-                        <a:rPr lang="en-US" sz="1500" dirty="0">
+                        <a:rPr lang="en-US" sz="1400" dirty="0">
                           <a:solidFill>
                             <a:schemeClr val="tx1"/>
                           </a:solidFill>
                         </a:rPr>
                         <a:t>C-I; less nephrotoxic, not more</a:t>
                       </a:r>
-                      <a:endParaRPr lang="en-US" sz="1500" dirty="0"/>
-                    </a:p>
-                    <a:p>
-                      <a:pPr indent="0" marL="0">
-                        <a:buNone/>
-                      </a:pPr>
-                      <a:r>
-                        <a:rPr lang="en-US" sz="1500" dirty="0">
+                      <a:endParaRPr lang="en-US" sz="1400" dirty="0"/>
+                    </a:p>
+                    <a:p>
+                      <a:pPr indent="0" marL="0">
+                        <a:buNone/>
+                      </a:pPr>
+                      <a:r>
+                        <a:rPr lang="en-US" sz="1400" dirty="0">
                           <a:solidFill>
                             <a:schemeClr val="tx1"/>
                           </a:solidFill>
                         </a:rPr>
                         <a:t>effective than deoxycholate</a:t>
                       </a:r>
-                      <a:endParaRPr lang="en-US" sz="1500" dirty="0"/>
+                      <a:endParaRPr lang="en-US" sz="1400" dirty="0"/>
                     </a:p>
                   </a:txBody>
                   <a:tcPr marL="25400" marR="101600" marT="63500" marB="63500" anchor="ctr">
@@ -15533,14 +15849,14 @@
                         <a:buNone/>
                       </a:pPr>
                       <a:r>
-                        <a:rPr lang="en-US" sz="1500" dirty="0">
+                        <a:rPr lang="en-US" sz="1400" dirty="0">
                           <a:solidFill>
                             <a:schemeClr val="tx1"/>
                           </a:solidFill>
                         </a:rPr>
                         <a:t>C-II</a:t>
                       </a:r>
-                      <a:endParaRPr lang="en-US" sz="1500" dirty="0"/>
+                      <a:endParaRPr lang="en-US" sz="1400" dirty="0"/>
                     </a:p>
                   </a:txBody>
                   <a:tcPr marL="25400" marR="101600" marT="63500" marB="63500" anchor="ctr">
@@ -15575,14 +15891,14 @@
                         <a:buNone/>
                       </a:pPr>
                       <a:r>
-                        <a:rPr lang="en-US" sz="1500" dirty="0">
+                        <a:rPr lang="en-US" sz="1400" dirty="0">
                           <a:solidFill>
                             <a:schemeClr val="tx1"/>
                           </a:solidFill>
                         </a:rPr>
                         <a:t>AmB deoxycholate</a:t>
                       </a:r>
-                      <a:endParaRPr lang="en-US" sz="1500" dirty="0"/>
+                      <a:endParaRPr lang="en-US" sz="1400" dirty="0"/>
                     </a:p>
                   </a:txBody>
                   <a:tcPr marL="25400" marR="101600" marT="63500" marB="63500" anchor="ctr">
@@ -15615,28 +15931,28 @@
                         <a:buNone/>
                       </a:pPr>
                       <a:r>
-                        <a:rPr lang="en-US" sz="1500" dirty="0">
+                        <a:rPr lang="en-US" sz="1400" dirty="0">
                           <a:solidFill>
                             <a:schemeClr val="tx1"/>
                           </a:solidFill>
                         </a:rPr>
                         <a:t>A-I against: less effective,</a:t>
                       </a:r>
-                      <a:endParaRPr lang="en-US" sz="1500" dirty="0"/>
-                    </a:p>
-                    <a:p>
-                      <a:pPr indent="0" marL="0">
-                        <a:buNone/>
-                      </a:pPr>
-                      <a:r>
-                        <a:rPr lang="en-US" sz="1500" dirty="0">
+                      <a:endParaRPr lang="en-US" sz="1400" dirty="0"/>
+                    </a:p>
+                    <a:p>
+                      <a:pPr indent="0" marL="0">
+                        <a:buNone/>
+                      </a:pPr>
+                      <a:r>
+                        <a:rPr lang="en-US" sz="1400" dirty="0">
                           <a:solidFill>
                             <a:schemeClr val="tx1"/>
                           </a:solidFill>
                         </a:rPr>
                         <a:t>more toxic</a:t>
                       </a:r>
-                      <a:endParaRPr lang="en-US" sz="1500" dirty="0"/>
+                      <a:endParaRPr lang="en-US" sz="1400" dirty="0"/>
                     </a:p>
                   </a:txBody>
                   <a:tcPr marL="25400" marR="101600" marT="63500" marB="63500" anchor="ctr">
@@ -15669,14 +15985,14 @@
                         <a:buNone/>
                       </a:pPr>
                       <a:r>
-                        <a:rPr lang="en-US" sz="1500" dirty="0">
+                        <a:rPr lang="en-US" sz="1400" dirty="0">
                           <a:solidFill>
                             <a:schemeClr val="tx1"/>
                           </a:solidFill>
                         </a:rPr>
                         <a:t>C-II</a:t>
                       </a:r>
-                      <a:endParaRPr lang="en-US" sz="1500" dirty="0"/>
+                      <a:endParaRPr lang="en-US" sz="1400" dirty="0"/>
                     </a:p>
                   </a:txBody>
                   <a:tcPr marL="25400" marR="101600" marT="63500" marB="63500" anchor="ctr">
@@ -15711,14 +16027,14 @@
                         <a:buNone/>
                       </a:pPr>
                       <a:r>
-                        <a:rPr lang="en-US" sz="1500" dirty="0">
+                        <a:rPr lang="en-US" sz="1400" dirty="0">
                           <a:solidFill>
                             <a:schemeClr val="tx1"/>
                           </a:solidFill>
                         </a:rPr>
                         <a:t>Posaconazole</a:t>
                       </a:r>
-                      <a:endParaRPr lang="en-US" sz="1500" dirty="0"/>
+                      <a:endParaRPr lang="en-US" sz="1400" dirty="0"/>
                     </a:p>
                   </a:txBody>
                   <a:tcPr marL="25400" marR="101600" marT="63500" marB="63500" anchor="ctr">
@@ -15751,14 +16067,14 @@
                         <a:buNone/>
                       </a:pPr>
                       <a:r>
-                        <a:rPr lang="en-US" sz="1500" dirty="0">
+                        <a:rPr lang="en-US" sz="1400" dirty="0">
                           <a:solidFill>
                             <a:schemeClr val="tx1"/>
                           </a:solidFill>
                         </a:rPr>
                         <a:t>Not in ECIL-6 table</a:t>
                       </a:r>
-                      <a:endParaRPr lang="en-US" sz="1500" dirty="0"/>
+                      <a:endParaRPr lang="en-US" sz="1400" dirty="0"/>
                     </a:p>
                   </a:txBody>
                   <a:tcPr marL="25400" marR="101600" marT="63500" marB="63500" anchor="ctr">
@@ -15791,14 +16107,14 @@
                         <a:buNone/>
                       </a:pPr>
                       <a:r>
-                        <a:rPr lang="en-US" sz="1500" dirty="0">
+                        <a:rPr lang="en-US" sz="1400" dirty="0">
                           <a:solidFill>
                             <a:schemeClr val="tx1"/>
                           </a:solidFill>
                         </a:rPr>
                         <a:t>C-III: no data for first line</a:t>
                       </a:r>
-                      <a:endParaRPr lang="en-US" sz="1500" dirty="0"/>
+                      <a:endParaRPr lang="en-US" sz="1400" dirty="0"/>
                     </a:p>
                   </a:txBody>
                   <a:tcPr marL="25400" marR="101600" marT="63500" marB="63500" anchor="ctr">
@@ -15833,14 +16149,14 @@
                         <a:buNone/>
                       </a:pPr>
                       <a:r>
-                        <a:rPr lang="en-US" sz="1500" dirty="0">
-                          <a:solidFill>
-                            <a:schemeClr val="tx1"/>
-                          </a:solidFill>
-                        </a:rPr>
-                        <a:t>Caspofungin</a:t>
-                      </a:r>
-                      <a:endParaRPr lang="en-US" sz="1500" dirty="0"/>
+                        <a:rPr lang="en-US" sz="1400" dirty="0">
+                          <a:solidFill>
+                            <a:schemeClr val="tx1"/>
+                          </a:solidFill>
+                        </a:rPr>
+                        <a:t>Caspofungin; itraconazole</a:t>
+                      </a:r>
+                      <a:endParaRPr lang="en-US" sz="1400" dirty="0"/>
                     </a:p>
                   </a:txBody>
                   <a:tcPr marL="25400" marR="101600" marT="63500" marB="63500" anchor="ctr">
@@ -15873,14 +16189,14 @@
                         <a:buNone/>
                       </a:pPr>
                       <a:r>
-                        <a:rPr lang="en-US" sz="1500" dirty="0">
-                          <a:solidFill>
-                            <a:schemeClr val="tx1"/>
-                          </a:solidFill>
-                        </a:rPr>
-                        <a:t>C-II</a:t>
-                      </a:r>
-                      <a:endParaRPr lang="en-US" sz="1500" dirty="0"/>
+                        <a:rPr lang="en-US" sz="1400" dirty="0">
+                          <a:solidFill>
+                            <a:schemeClr val="tx1"/>
+                          </a:solidFill>
+                        </a:rPr>
+                        <a:t>C-II; C-III</a:t>
+                      </a:r>
+                      <a:endParaRPr lang="en-US" sz="1400" dirty="0"/>
                     </a:p>
                   </a:txBody>
                   <a:tcPr marL="25400" marR="101600" marT="63500" marB="63500" anchor="ctr">
@@ -15913,14 +16229,14 @@
                         <a:buNone/>
                       </a:pPr>
                       <a:r>
-                        <a:rPr lang="en-US" sz="1500" dirty="0">
+                        <a:rPr lang="en-US" sz="1400" dirty="0">
                           <a:solidFill>
                             <a:schemeClr val="tx1"/>
                           </a:solidFill>
                         </a:rPr>
                         <a:t>—</a:t>
                       </a:r>
-                      <a:endParaRPr lang="en-US" sz="1500" dirty="0"/>
+                      <a:endParaRPr lang="en-US" sz="1400" dirty="0"/>
                     </a:p>
                   </a:txBody>
                   <a:tcPr marL="25400" marR="101600" marT="63500" marB="63500" anchor="ctr">
@@ -15955,14 +16271,14 @@
                         <a:buNone/>
                       </a:pPr>
                       <a:r>
-                        <a:rPr lang="en-US" sz="1500" dirty="0">
-                          <a:solidFill>
-                            <a:schemeClr val="tx1"/>
-                          </a:solidFill>
-                        </a:rPr>
-                        <a:t>Itraconazole</a:t>
-                      </a:r>
-                      <a:endParaRPr lang="en-US" sz="1500" dirty="0"/>
+                        <a:rPr lang="en-US" sz="1400" dirty="0">
+                          <a:solidFill>
+                            <a:schemeClr val="tx1"/>
+                          </a:solidFill>
+                        </a:rPr>
+                        <a:t>Combinations</a:t>
+                      </a:r>
+                      <a:endParaRPr lang="en-US" sz="1400" dirty="0"/>
                     </a:p>
                   </a:txBody>
                   <a:tcPr marL="25400" marR="101600" marT="63500" marB="63500" anchor="ctr">
@@ -15975,7 +16291,7 @@
                     <a:lnT w="0" cap="flat" cmpd="sng" algn="ctr">
                       <a:noFill/>
                     </a:lnT>
-                    <a:lnB w="6350" cap="flat" cmpd="sng" algn="ctr">
+                    <a:lnB w="19050" cap="flat" cmpd="sng" algn="ctr">
                       <a:solidFill>
                         <a:srgbClr val="000000"/>
                       </a:solidFill>
@@ -15995,14 +16311,28 @@
                         <a:buNone/>
                       </a:pPr>
                       <a:r>
-                        <a:rPr lang="en-US" sz="1500" dirty="0">
-                          <a:solidFill>
-                            <a:schemeClr val="tx1"/>
-                          </a:solidFill>
-                        </a:rPr>
-                        <a:t>C-III</a:t>
-                      </a:r>
-                      <a:endParaRPr lang="en-US" sz="1500" dirty="0"/>
+                        <a:rPr lang="en-US" sz="1400" dirty="0">
+                          <a:solidFill>
+                            <a:schemeClr val="tx1"/>
+                          </a:solidFill>
+                        </a:rPr>
+                        <a:t>Anidulafungin + voriconazole C-I;</a:t>
+                      </a:r>
+                      <a:endParaRPr lang="en-US" sz="1400" dirty="0"/>
+                    </a:p>
+                    <a:p>
+                      <a:pPr indent="0" marL="0">
+                        <a:buNone/>
+                      </a:pPr>
+                      <a:r>
+                        <a:rPr lang="en-US" sz="1400" dirty="0">
+                          <a:solidFill>
+                            <a:schemeClr val="tx1"/>
+                          </a:solidFill>
+                        </a:rPr>
+                        <a:t>others C-III</a:t>
+                      </a:r>
+                      <a:endParaRPr lang="en-US" sz="1400" dirty="0"/>
                     </a:p>
                   </a:txBody>
                   <a:tcPr marL="25400" marR="101600" marT="63500" marB="63500" anchor="ctr">
@@ -16015,7 +16345,7 @@
                     <a:lnT w="0" cap="flat" cmpd="sng" algn="ctr">
                       <a:noFill/>
                     </a:lnT>
-                    <a:lnB w="6350" cap="flat" cmpd="sng" algn="ctr">
+                    <a:lnB w="19050" cap="flat" cmpd="sng" algn="ctr">
                       <a:solidFill>
                         <a:srgbClr val="000000"/>
                       </a:solidFill>
@@ -16035,150 +16365,14 @@
                         <a:buNone/>
                       </a:pPr>
                       <a:r>
-                        <a:rPr lang="en-US" sz="1500" dirty="0">
-                          <a:solidFill>
-                            <a:schemeClr val="tx1"/>
-                          </a:solidFill>
-                        </a:rPr>
-                        <a:t>—</a:t>
-                      </a:r>
-                      <a:endParaRPr lang="en-US" sz="1500" dirty="0"/>
-                    </a:p>
-                  </a:txBody>
-                  <a:tcPr marL="25400" marR="101600" marT="63500" marB="63500" anchor="ctr">
-                    <a:lnL w="0" cap="flat" cmpd="sng" algn="ctr">
-                      <a:noFill/>
-                    </a:lnL>
-                    <a:lnR w="0" cap="flat" cmpd="sng" algn="ctr">
-                      <a:noFill/>
-                    </a:lnR>
-                    <a:lnT w="0" cap="flat" cmpd="sng" algn="ctr">
-                      <a:noFill/>
-                    </a:lnT>
-                    <a:lnB w="6350" cap="flat" cmpd="sng" algn="ctr">
-                      <a:solidFill>
-                        <a:srgbClr val="000000"/>
-                      </a:solidFill>
-                      <a:prstDash val="solid"/>
-                      <a:round/>
-                      <a:headEnd type="none" w="med" len="med"/>
-                      <a:tailEnd type="none" w="med" len="med"/>
-                    </a:lnB>
-                  </a:tcPr>
-                </a:tc>
-              </a:tr>
-              <a:tr h="0">
-                <a:tc>
-                  <a:txBody>
-                    <a:bodyPr/>
-                    <a:lstStyle/>
-                    <a:p>
-                      <a:pPr indent="0" marL="0">
-                        <a:buNone/>
-                      </a:pPr>
-                      <a:r>
-                        <a:rPr lang="en-US" sz="1500" dirty="0">
-                          <a:solidFill>
-                            <a:schemeClr val="tx1"/>
-                          </a:solidFill>
-                        </a:rPr>
-                        <a:t>Combinations</a:t>
-                      </a:r>
-                      <a:endParaRPr lang="en-US" sz="1500" dirty="0"/>
-                    </a:p>
-                  </a:txBody>
-                  <a:tcPr marL="25400" marR="101600" marT="63500" marB="63500" anchor="ctr">
-                    <a:lnL w="0" cap="flat" cmpd="sng" algn="ctr">
-                      <a:noFill/>
-                    </a:lnL>
-                    <a:lnR w="0" cap="flat" cmpd="sng" algn="ctr">
-                      <a:noFill/>
-                    </a:lnR>
-                    <a:lnT w="0" cap="flat" cmpd="sng" algn="ctr">
-                      <a:noFill/>
-                    </a:lnT>
-                    <a:lnB w="19050" cap="flat" cmpd="sng" algn="ctr">
-                      <a:solidFill>
-                        <a:srgbClr val="000000"/>
-                      </a:solidFill>
-                      <a:prstDash val="solid"/>
-                      <a:round/>
-                      <a:headEnd type="none" w="med" len="med"/>
-                      <a:tailEnd type="none" w="med" len="med"/>
-                    </a:lnB>
-                  </a:tcPr>
-                </a:tc>
-                <a:tc>
-                  <a:txBody>
-                    <a:bodyPr/>
-                    <a:lstStyle/>
-                    <a:p>
-                      <a:pPr indent="0" marL="0">
-                        <a:buNone/>
-                      </a:pPr>
-                      <a:r>
-                        <a:rPr lang="en-US" sz="1500" dirty="0">
-                          <a:solidFill>
-                            <a:schemeClr val="tx1"/>
-                          </a:solidFill>
-                        </a:rPr>
-                        <a:t>Anidulafungin + voriconazole C-I;</a:t>
-                      </a:r>
-                      <a:endParaRPr lang="en-US" sz="1500" dirty="0"/>
-                    </a:p>
-                    <a:p>
-                      <a:pPr indent="0" marL="0">
-                        <a:buNone/>
-                      </a:pPr>
-                      <a:r>
-                        <a:rPr lang="en-US" sz="1500" dirty="0">
-                          <a:solidFill>
-                            <a:schemeClr val="tx1"/>
-                          </a:solidFill>
-                        </a:rPr>
-                        <a:t>others C-III</a:t>
-                      </a:r>
-                      <a:endParaRPr lang="en-US" sz="1500" dirty="0"/>
-                    </a:p>
-                  </a:txBody>
-                  <a:tcPr marL="25400" marR="101600" marT="63500" marB="63500" anchor="ctr">
-                    <a:lnL w="0" cap="flat" cmpd="sng" algn="ctr">
-                      <a:noFill/>
-                    </a:lnL>
-                    <a:lnR w="0" cap="flat" cmpd="sng" algn="ctr">
-                      <a:noFill/>
-                    </a:lnR>
-                    <a:lnT w="0" cap="flat" cmpd="sng" algn="ctr">
-                      <a:noFill/>
-                    </a:lnT>
-                    <a:lnB w="19050" cap="flat" cmpd="sng" algn="ctr">
-                      <a:solidFill>
-                        <a:srgbClr val="000000"/>
-                      </a:solidFill>
-                      <a:prstDash val="solid"/>
-                      <a:round/>
-                      <a:headEnd type="none" w="med" len="med"/>
-                      <a:tailEnd type="none" w="med" len="med"/>
-                    </a:lnB>
-                  </a:tcPr>
-                </a:tc>
-                <a:tc>
-                  <a:txBody>
-                    <a:bodyPr/>
-                    <a:lstStyle/>
-                    <a:p>
-                      <a:pPr indent="0" marL="0">
-                        <a:buNone/>
-                      </a:pPr>
-                      <a:r>
-                        <a:rPr lang="en-US" sz="1500" dirty="0">
+                        <a:rPr lang="en-US" sz="1400" dirty="0">
                           <a:solidFill>
                             <a:schemeClr val="tx1"/>
                           </a:solidFill>
                         </a:rPr>
                         <a:t>C-III</a:t>
                       </a:r>
-                      <a:endParaRPr lang="en-US" sz="1500" dirty="0"/>
+                      <a:endParaRPr lang="en-US" sz="1400" dirty="0"/>
                     </a:p>
                   </a:txBody>
                   <a:tcPr marL="25400" marR="101600" marT="63500" marB="63500" anchor="ctr">
@@ -16246,7 +16440,7 @@
             <a:pPr algn="r"/>
             <a:fld id="{F7021451-1387-4CA6-816F-3879F97B5CBC}" type="slidenum">
               <a:rPr b="0" lang="en-US"/>
-              <a:t>25</a:t>
+              <a:t>26</a:t>
             </a:fld>
             <a:endParaRPr lang="en-US"/>
           </a:p>
@@ -16260,9 +16454,9 @@
 </p:sld>
 </file>
 
-<file path=ppt/slides/slide26.xml><?xml version="1.0" encoding="utf-8"?>
+<file path=ppt/slides/slide27.xml><?xml version="1.0" encoding="utf-8"?>
 <p:sld xmlns:a="http://schemas.openxmlformats.org/drawingml/2006/main" xmlns:r="http://schemas.openxmlformats.org/officeDocument/2006/relationships" xmlns:p="http://schemas.openxmlformats.org/presentationml/2006/main">
-  <p:cSld name="Slide 26">
+  <p:cSld name="Slide 27">
     <p:spTree>
       <p:nvGrpSpPr>
         <p:cNvPr id="1" name=""/>
@@ -16309,7 +16503,7 @@
                   <a:schemeClr val="tx1"/>
                 </a:solidFill>
               </a:rPr>
-              <a:t>BACKUP · BACKUP · PROPHYLAXIS TRIALS</a:t>
+              <a:t>BACKUP · PROPHYLAXIS TRIALS</a:t>
             </a:r>
             <a:endParaRPr lang="en-US" sz="1100" dirty="0"/>
           </a:p>
@@ -16393,7 +16587,7 @@
       </p:sp>
       <p:graphicFrame>
         <p:nvGraphicFramePr>
-          <p:cNvPr id="27" name="Table 84"/>
+          <p:cNvPr id="28" name="Table 85"/>
           <p:cNvGraphicFramePr>
             <a:graphicFrameLocks noGrp="1"/>
           </p:cNvGraphicFramePr>
@@ -17267,7 +17461,7 @@
             <a:pPr algn="r"/>
             <a:fld id="{F7021451-1387-4CA6-816F-3879F97B5CBC}" type="slidenum">
               <a:rPr b="0" lang="en-US"/>
-              <a:t>26</a:t>
+              <a:t>27</a:t>
             </a:fld>
             <a:endParaRPr lang="en-US"/>
           </a:p>
@@ -17281,9 +17475,9 @@
 </p:sld>
 </file>
 
-<file path=ppt/slides/slide27.xml><?xml version="1.0" encoding="utf-8"?>
+<file path=ppt/slides/slide28.xml><?xml version="1.0" encoding="utf-8"?>
 <p:sld xmlns:a="http://schemas.openxmlformats.org/drawingml/2006/main" xmlns:r="http://schemas.openxmlformats.org/officeDocument/2006/relationships" xmlns:p="http://schemas.openxmlformats.org/presentationml/2006/main">
-  <p:cSld name="Slide 27">
+  <p:cSld name="Slide 28">
     <p:spTree>
       <p:nvGrpSpPr>
         <p:cNvPr id="1" name=""/>
@@ -17330,7 +17524,7 @@
                   <a:schemeClr val="tx1"/>
                 </a:solidFill>
               </a:rPr>
-              <a:t>BACKUP · BACKUP · NOVEL AGENTS</a:t>
+              <a:t>BACKUP · NOVEL AGENTS</a:t>
             </a:r>
             <a:endParaRPr lang="en-US" sz="1100" dirty="0"/>
           </a:p>
@@ -17414,7 +17608,7 @@
       </p:sp>
       <p:sp>
         <p:nvSpPr>
-          <p:cNvPr id="6" name="Text 85"/>
+          <p:cNvPr id="6" name="Text 86"/>
           <p:cNvSpPr txBox="1"/>
           <p:nvPr/>
         </p:nvSpPr>
@@ -17563,7 +17757,7 @@
             <a:pPr algn="r"/>
             <a:fld id="{F7021451-1387-4CA6-816F-3879F97B5CBC}" type="slidenum">
               <a:rPr b="0" lang="en-US"/>
-              <a:t>27</a:t>
+              <a:t>28</a:t>
             </a:fld>
             <a:endParaRPr lang="en-US"/>
           </a:p>
@@ -18500,7 +18694,7 @@
                   <a:schemeClr val="tx1"/>
                 </a:solidFill>
               </a:rPr>
-              <a:t>IFD risk follows three periods after allogeneic HCT</a:t>
+              <a:t>Three risk periods shape IFD after allo-HCT</a:t>
             </a:r>
             <a:endParaRPr lang="en-US" sz="3600" dirty="0"/>
           </a:p>
@@ -21104,8 +21298,8 @@
               <a:tblPr/>
               <a:tblGrid>
                 <a:gridCol w="2926080"/>
-                <a:gridCol w="4078224"/>
-                <a:gridCol w="3813048"/>
+                <a:gridCol w="3904488"/>
+                <a:gridCol w="3986784"/>
               </a:tblGrid>
               <a:tr h="0">
                 <a:tc>
@@ -21117,14 +21311,14 @@
                         <a:buNone/>
                       </a:pPr>
                       <a:r>
-                        <a:rPr lang="en-US" sz="1400" b="1" dirty="0">
+                        <a:rPr lang="en-US" sz="1300" b="1" dirty="0">
                           <a:solidFill>
                             <a:schemeClr val="tx1"/>
                           </a:solidFill>
                         </a:rPr>
                         <a:t>Test</a:t>
                       </a:r>
-                      <a:endParaRPr lang="en-US" sz="1400" dirty="0"/>
+                      <a:endParaRPr lang="en-US" sz="1300" dirty="0"/>
                     </a:p>
                   </a:txBody>
                   <a:tcPr marL="25400" marR="101600" marT="63500" marB="63500" anchor="ctr">
@@ -21163,14 +21357,14 @@
                         <a:buNone/>
                       </a:pPr>
                       <a:r>
-                        <a:rPr lang="en-US" sz="1400" b="1" dirty="0">
+                        <a:rPr lang="en-US" sz="1300" b="1" dirty="0">
                           <a:solidFill>
                             <a:schemeClr val="tx1"/>
                           </a:solidFill>
                         </a:rPr>
                         <a:t>Strength</a:t>
                       </a:r>
-                      <a:endParaRPr lang="en-US" sz="1400" dirty="0"/>
+                      <a:endParaRPr lang="en-US" sz="1300" dirty="0"/>
                     </a:p>
                   </a:txBody>
                   <a:tcPr marL="25400" marR="101600" marT="63500" marB="63500" anchor="ctr">
@@ -21209,14 +21403,14 @@
                         <a:buNone/>
                       </a:pPr>
                       <a:r>
-                        <a:rPr lang="en-US" sz="1400" b="1" dirty="0">
+                        <a:rPr lang="en-US" sz="1300" b="1" dirty="0">
                           <a:solidFill>
                             <a:schemeClr val="tx1"/>
                           </a:solidFill>
                         </a:rPr>
                         <a:t>Limitation</a:t>
                       </a:r>
-                      <a:endParaRPr lang="en-US" sz="1400" dirty="0"/>
+                      <a:endParaRPr lang="en-US" sz="1300" dirty="0"/>
                     </a:p>
                   </a:txBody>
                   <a:tcPr marL="25400" marR="101600" marT="63500" marB="63500" anchor="ctr">
@@ -21257,14 +21451,14 @@
                         <a:buNone/>
                       </a:pPr>
                       <a:r>
-                        <a:rPr lang="en-US" sz="1400" dirty="0">
+                        <a:rPr lang="en-US" sz="1300" dirty="0">
                           <a:solidFill>
                             <a:schemeClr val="tx1"/>
                           </a:solidFill>
                         </a:rPr>
                         <a:t>β-D-glucan (Fungitell; WAKO)</a:t>
                       </a:r>
-                      <a:endParaRPr lang="en-US" sz="1400" dirty="0"/>
+                      <a:endParaRPr lang="en-US" sz="1300" dirty="0"/>
                     </a:p>
                   </a:txBody>
                   <a:tcPr marL="25400" marR="101600" marT="63500" marB="63500" anchor="ctr">
@@ -21297,28 +21491,28 @@
                         <a:buNone/>
                       </a:pPr>
                       <a:r>
-                        <a:rPr lang="en-US" sz="1400" dirty="0">
+                        <a:rPr lang="en-US" sz="1300" dirty="0">
                           <a:solidFill>
                             <a:schemeClr val="tx1"/>
                           </a:solidFill>
                         </a:rPr>
                         <a:t>Broad: Candida, Aspergillus, Fusarium,</a:t>
                       </a:r>
-                      <a:endParaRPr lang="en-US" sz="1400" dirty="0"/>
-                    </a:p>
-                    <a:p>
-                      <a:pPr indent="0" marL="0">
-                        <a:buNone/>
-                      </a:pPr>
-                      <a:r>
-                        <a:rPr lang="en-US" sz="1400" dirty="0">
+                      <a:endParaRPr lang="en-US" sz="1300" dirty="0"/>
+                    </a:p>
+                    <a:p>
+                      <a:pPr indent="0" marL="0">
+                        <a:buNone/>
+                      </a:pPr>
+                      <a:r>
+                        <a:rPr lang="en-US" sz="1300" dirty="0">
                           <a:solidFill>
                             <a:schemeClr val="tx1"/>
                           </a:solidFill>
                         </a:rPr>
                         <a:t>PJP; NPV around 80–90%</a:t>
                       </a:r>
-                      <a:endParaRPr lang="en-US" sz="1400" dirty="0"/>
+                      <a:endParaRPr lang="en-US" sz="1300" dirty="0"/>
                     </a:p>
                   </a:txBody>
                   <a:tcPr marL="25400" marR="101600" marT="63500" marB="63500" anchor="ctr">
@@ -21351,28 +21545,28 @@
                         <a:buNone/>
                       </a:pPr>
                       <a:r>
-                        <a:rPr lang="en-US" sz="1400" dirty="0">
+                        <a:rPr lang="en-US" sz="1300" dirty="0">
                           <a:solidFill>
                             <a:schemeClr val="tx1"/>
                           </a:solidFill>
                         </a:rPr>
                         <a:t>Poor specificity and PPV;</a:t>
                       </a:r>
-                      <a:endParaRPr lang="en-US" sz="1400" dirty="0"/>
-                    </a:p>
-                    <a:p>
-                      <a:pPr indent="0" marL="0">
-                        <a:buNone/>
-                      </a:pPr>
-                      <a:r>
-                        <a:rPr lang="en-US" sz="1400" dirty="0">
+                      <a:endParaRPr lang="en-US" sz="1300" dirty="0"/>
+                    </a:p>
+                    <a:p>
+                      <a:pPr indent="0" marL="0">
+                        <a:buNone/>
+                      </a:pPr>
+                      <a:r>
+                        <a:rPr lang="en-US" sz="1300" dirty="0">
                           <a:solidFill>
                             <a:schemeClr val="tx1"/>
                           </a:solidFill>
                         </a:rPr>
                         <a:t>misses Mucorales</a:t>
                       </a:r>
-                      <a:endParaRPr lang="en-US" sz="1400" dirty="0"/>
+                      <a:endParaRPr lang="en-US" sz="1300" dirty="0"/>
                     </a:p>
                   </a:txBody>
                   <a:tcPr marL="25400" marR="101600" marT="63500" marB="63500" anchor="ctr">
@@ -21407,14 +21601,14 @@
                         <a:buNone/>
                       </a:pPr>
                       <a:r>
-                        <a:rPr lang="en-US" sz="1400" dirty="0">
+                        <a:rPr lang="en-US" sz="1300" dirty="0">
                           <a:solidFill>
                             <a:schemeClr val="tx1"/>
                           </a:solidFill>
                         </a:rPr>
                         <a:t>Aspergillus PCR</a:t>
                       </a:r>
-                      <a:endParaRPr lang="en-US" sz="1400" dirty="0"/>
+                      <a:endParaRPr lang="en-US" sz="1300" dirty="0"/>
                     </a:p>
                   </a:txBody>
                   <a:tcPr marL="25400" marR="101600" marT="63500" marB="63500" anchor="ctr">
@@ -21447,14 +21641,14 @@
                         <a:buNone/>
                       </a:pPr>
                       <a:r>
-                        <a:rPr lang="en-US" sz="1400" dirty="0">
+                        <a:rPr lang="en-US" sz="1300" dirty="0">
                           <a:solidFill>
                             <a:schemeClr val="tx1"/>
                           </a:solidFill>
                         </a:rPr>
                         <a:t>Protocols standardised by EAPCRI</a:t>
                       </a:r>
-                      <a:endParaRPr lang="en-US" sz="1400" dirty="0"/>
+                      <a:endParaRPr lang="en-US" sz="1300" dirty="0"/>
                     </a:p>
                   </a:txBody>
                   <a:tcPr marL="25400" marR="101600" marT="63500" marB="63500" anchor="ctr">
@@ -21487,28 +21681,14 @@
                         <a:buNone/>
                       </a:pPr>
                       <a:r>
-                        <a:rPr lang="en-US" sz="1400" dirty="0">
-                          <a:solidFill>
-                            <a:schemeClr val="tx1"/>
-                          </a:solidFill>
-                        </a:rPr>
-                        <a:t>Long held back by lack of</a:t>
-                      </a:r>
-                      <a:endParaRPr lang="en-US" sz="1400" dirty="0"/>
-                    </a:p>
-                    <a:p>
-                      <a:pPr indent="0" marL="0">
-                        <a:buNone/>
-                      </a:pPr>
-                      <a:r>
-                        <a:rPr lang="en-US" sz="1400" dirty="0">
-                          <a:solidFill>
-                            <a:schemeClr val="tx1"/>
-                          </a:solidFill>
-                        </a:rPr>
-                        <a:t>standardisation</a:t>
-                      </a:r>
-                      <a:endParaRPr lang="en-US" sz="1400" dirty="0"/>
+                        <a:rPr lang="en-US" sz="1300" dirty="0">
+                          <a:solidFill>
+                            <a:schemeClr val="tx1"/>
+                          </a:solidFill>
+                        </a:rPr>
+                        <a:t>Long held back by lack of standardisation</a:t>
+                      </a:r>
+                      <a:endParaRPr lang="en-US" sz="1300" dirty="0"/>
                     </a:p>
                   </a:txBody>
                   <a:tcPr marL="25400" marR="101600" marT="63500" marB="63500" anchor="ctr">
@@ -21543,14 +21723,14 @@
                         <a:buNone/>
                       </a:pPr>
                       <a:r>
-                        <a:rPr lang="en-US" sz="1400" dirty="0">
+                        <a:rPr lang="en-US" sz="1300" dirty="0">
                           <a:solidFill>
                             <a:schemeClr val="tx1"/>
                           </a:solidFill>
                         </a:rPr>
                         <a:t>Blood culture for Candida</a:t>
                       </a:r>
-                      <a:endParaRPr lang="en-US" sz="1400" dirty="0"/>
+                      <a:endParaRPr lang="en-US" sz="1300" dirty="0"/>
                     </a:p>
                   </a:txBody>
                   <a:tcPr marL="25400" marR="101600" marT="63500" marB="63500" anchor="ctr">
@@ -21583,28 +21763,14 @@
                         <a:buNone/>
                       </a:pPr>
                       <a:r>
-                        <a:rPr lang="en-US" sz="1400" dirty="0">
-                          <a:solidFill>
-                            <a:schemeClr val="tx1"/>
-                          </a:solidFill>
-                        </a:rPr>
-                        <a:t>Gold standard; species and</a:t>
-                      </a:r>
-                      <a:endParaRPr lang="en-US" sz="1400" dirty="0"/>
-                    </a:p>
-                    <a:p>
-                      <a:pPr indent="0" marL="0">
-                        <a:buNone/>
-                      </a:pPr>
-                      <a:r>
-                        <a:rPr lang="en-US" sz="1400" dirty="0">
-                          <a:solidFill>
-                            <a:schemeClr val="tx1"/>
-                          </a:solidFill>
-                        </a:rPr>
-                        <a:t>susceptibility</a:t>
-                      </a:r>
-                      <a:endParaRPr lang="en-US" sz="1400" dirty="0"/>
+                        <a:rPr lang="en-US" sz="1300" dirty="0">
+                          <a:solidFill>
+                            <a:schemeClr val="tx1"/>
+                          </a:solidFill>
+                        </a:rPr>
+                        <a:t>Gold standard; species and susceptibility</a:t>
+                      </a:r>
+                      <a:endParaRPr lang="en-US" sz="1300" dirty="0"/>
                     </a:p>
                   </a:txBody>
                   <a:tcPr marL="25400" marR="101600" marT="63500" marB="63500" anchor="ctr">
@@ -21637,28 +21803,28 @@
                         <a:buNone/>
                       </a:pPr>
                       <a:r>
-                        <a:rPr lang="en-US" sz="1400" dirty="0">
+                        <a:rPr lang="en-US" sz="1300" dirty="0">
                           <a:solidFill>
                             <a:schemeClr val="tx1"/>
                           </a:solidFill>
                         </a:rPr>
                         <a:t>2–5 days; low sensitivity in</a:t>
                       </a:r>
-                      <a:endParaRPr lang="en-US" sz="1400" dirty="0"/>
-                    </a:p>
-                    <a:p>
-                      <a:pPr indent="0" marL="0">
-                        <a:buNone/>
-                      </a:pPr>
-                      <a:r>
-                        <a:rPr lang="en-US" sz="1400" dirty="0">
+                      <a:endParaRPr lang="en-US" sz="1300" dirty="0"/>
+                    </a:p>
+                    <a:p>
+                      <a:pPr indent="0" marL="0">
+                        <a:buNone/>
+                      </a:pPr>
+                      <a:r>
+                        <a:rPr lang="en-US" sz="1300" dirty="0">
                           <a:solidFill>
                             <a:schemeClr val="tx1"/>
                           </a:solidFill>
                         </a:rPr>
                         <a:t>chronic disseminated candidiasis</a:t>
                       </a:r>
-                      <a:endParaRPr lang="en-US" sz="1400" dirty="0"/>
+                      <a:endParaRPr lang="en-US" sz="1300" dirty="0"/>
                     </a:p>
                   </a:txBody>
                   <a:tcPr marL="25400" marR="101600" marT="63500" marB="63500" anchor="ctr">
@@ -21693,14 +21859,14 @@
                         <a:buNone/>
                       </a:pPr>
                       <a:r>
-                        <a:rPr lang="en-US" sz="1400" dirty="0">
+                        <a:rPr lang="en-US" sz="1300" dirty="0">
                           <a:solidFill>
                             <a:schemeClr val="tx1"/>
                           </a:solidFill>
                         </a:rPr>
                         <a:t>T2Candida panel</a:t>
                       </a:r>
-                      <a:endParaRPr lang="en-US" sz="1400" dirty="0"/>
+                      <a:endParaRPr lang="en-US" sz="1300" dirty="0"/>
                     </a:p>
                   </a:txBody>
                   <a:tcPr marL="25400" marR="101600" marT="63500" marB="63500" anchor="ctr">
@@ -21733,28 +21899,28 @@
                         <a:buNone/>
                       </a:pPr>
                       <a:r>
-                        <a:rPr lang="en-US" sz="1400" dirty="0">
+                        <a:rPr lang="en-US" sz="1300" dirty="0">
                           <a:solidFill>
                             <a:schemeClr val="tx1"/>
                           </a:solidFill>
                         </a:rPr>
                         <a:t>Species in &lt; 5 h; NPV ≈ 100% at</a:t>
                       </a:r>
-                      <a:endParaRPr lang="en-US" sz="1400" dirty="0"/>
-                    </a:p>
-                    <a:p>
-                      <a:pPr indent="0" marL="0">
-                        <a:buNone/>
-                      </a:pPr>
-                      <a:r>
-                        <a:rPr lang="en-US" sz="1400" dirty="0">
+                      <a:endParaRPr lang="en-US" sz="1300" dirty="0"/>
+                    </a:p>
+                    <a:p>
+                      <a:pPr indent="0" marL="0">
+                        <a:buNone/>
+                      </a:pPr>
+                      <a:r>
+                        <a:rPr lang="en-US" sz="1300" dirty="0">
                           <a:solidFill>
                             <a:schemeClr val="tx1"/>
                           </a:solidFill>
                         </a:rPr>
                         <a:t>5–10% prevalence</a:t>
                       </a:r>
-                      <a:endParaRPr lang="en-US" sz="1400" dirty="0"/>
+                      <a:endParaRPr lang="en-US" sz="1300" dirty="0"/>
                     </a:p>
                   </a:txBody>
                   <a:tcPr marL="25400" marR="101600" marT="63500" marB="63500" anchor="ctr">
@@ -21787,14 +21953,14 @@
                         <a:buNone/>
                       </a:pPr>
                       <a:r>
-                        <a:rPr lang="en-US" sz="1400" dirty="0">
+                        <a:rPr lang="en-US" sz="1300" dirty="0">
                           <a:solidFill>
                             <a:schemeClr val="tx1"/>
                           </a:solidFill>
                         </a:rPr>
                         <a:t>Detects only five Candida species</a:t>
                       </a:r>
-                      <a:endParaRPr lang="en-US" sz="1400" dirty="0"/>
+                      <a:endParaRPr lang="en-US" sz="1300" dirty="0"/>
                     </a:p>
                   </a:txBody>
                   <a:tcPr marL="25400" marR="101600" marT="63500" marB="63500" anchor="ctr">
@@ -21829,14 +21995,14 @@
                         <a:buNone/>
                       </a:pPr>
                       <a:r>
-                        <a:rPr lang="en-US" sz="1400" dirty="0">
+                        <a:rPr lang="en-US" sz="1300" dirty="0">
                           <a:solidFill>
                             <a:schemeClr val="tx1"/>
                           </a:solidFill>
                         </a:rPr>
                         <a:t>Cryptococcal antigen</a:t>
                       </a:r>
-                      <a:endParaRPr lang="en-US" sz="1400" dirty="0"/>
+                      <a:endParaRPr lang="en-US" sz="1300" dirty="0"/>
                     </a:p>
                   </a:txBody>
                   <a:tcPr marL="25400" marR="101600" marT="63500" marB="63500" anchor="ctr">
@@ -21869,14 +22035,14 @@
                         <a:buNone/>
                       </a:pPr>
                       <a:r>
-                        <a:rPr lang="en-US" sz="1400" dirty="0">
+                        <a:rPr lang="en-US" sz="1300" dirty="0">
                           <a:solidFill>
                             <a:schemeClr val="tx1"/>
                           </a:solidFill>
                         </a:rPr>
                         <a:t>Very sensitive</a:t>
                       </a:r>
-                      <a:endParaRPr lang="en-US" sz="1400" dirty="0"/>
+                      <a:endParaRPr lang="en-US" sz="1300" dirty="0"/>
                     </a:p>
                   </a:txBody>
                   <a:tcPr marL="25400" marR="101600" marT="63500" marB="63500" anchor="ctr">
@@ -21909,14 +22075,14 @@
                         <a:buNone/>
                       </a:pPr>
                       <a:r>
-                        <a:rPr lang="en-US" sz="1400" dirty="0">
+                        <a:rPr lang="en-US" sz="1300" dirty="0">
                           <a:solidFill>
                             <a:schemeClr val="tx1"/>
                           </a:solidFill>
                         </a:rPr>
                         <a:t>Use when meningitis is suspected</a:t>
                       </a:r>
-                      <a:endParaRPr lang="en-US" sz="1400" dirty="0"/>
+                      <a:endParaRPr lang="en-US" sz="1300" dirty="0"/>
                     </a:p>
                   </a:txBody>
                   <a:tcPr marL="25400" marR="101600" marT="63500" marB="63500" anchor="ctr">
@@ -21951,28 +22117,14 @@
                         <a:buNone/>
                       </a:pPr>
                       <a:r>
-                        <a:rPr lang="en-US" sz="1400" dirty="0">
-                          <a:solidFill>
-                            <a:schemeClr val="tx1"/>
-                          </a:solidFill>
-                        </a:rPr>
-                        <a:t>PJP: immunofluorescence;</a:t>
-                      </a:r>
-                      <a:endParaRPr lang="en-US" sz="1400" dirty="0"/>
-                    </a:p>
-                    <a:p>
-                      <a:pPr indent="0" marL="0">
-                        <a:buNone/>
-                      </a:pPr>
-                      <a:r>
-                        <a:rPr lang="en-US" sz="1400" dirty="0">
-                          <a:solidFill>
-                            <a:schemeClr val="tx1"/>
-                          </a:solidFill>
-                        </a:rPr>
-                        <a:t>BAL real-time PCR</a:t>
-                      </a:r>
-                      <a:endParaRPr lang="en-US" sz="1400" dirty="0"/>
+                        <a:rPr lang="en-US" sz="1300" dirty="0">
+                          <a:solidFill>
+                            <a:schemeClr val="tx1"/>
+                          </a:solidFill>
+                        </a:rPr>
+                        <a:t>PJP: immunofluorescence; BAL PCR</a:t>
+                      </a:r>
+                      <a:endParaRPr lang="en-US" sz="1300" dirty="0"/>
                     </a:p>
                   </a:txBody>
                   <a:tcPr marL="25400" marR="101600" marT="63500" marB="63500" anchor="ctr">
@@ -22005,28 +22157,28 @@
                         <a:buNone/>
                       </a:pPr>
                       <a:r>
-                        <a:rPr lang="en-US" sz="1400" dirty="0">
+                        <a:rPr lang="en-US" sz="1300" dirty="0">
                           <a:solidFill>
                             <a:schemeClr val="tx1"/>
                           </a:solidFill>
                         </a:rPr>
                         <a:t>Most sensitive microscopy;</a:t>
                       </a:r>
-                      <a:endParaRPr lang="en-US" sz="1400" dirty="0"/>
-                    </a:p>
-                    <a:p>
-                      <a:pPr indent="0" marL="0">
-                        <a:buNone/>
-                      </a:pPr>
-                      <a:r>
-                        <a:rPr lang="en-US" sz="1400" dirty="0">
+                      <a:endParaRPr lang="en-US" sz="1300" dirty="0"/>
+                    </a:p>
+                    <a:p>
+                      <a:pPr indent="0" marL="0">
+                        <a:buNone/>
+                      </a:pPr>
+                      <a:r>
+                        <a:rPr lang="en-US" sz="1300" dirty="0">
                           <a:solidFill>
                             <a:schemeClr val="tx1"/>
                           </a:solidFill>
                         </a:rPr>
                         <a:t>negative PCR rules out PJP</a:t>
                       </a:r>
-                      <a:endParaRPr lang="en-US" sz="1400" dirty="0"/>
+                      <a:endParaRPr lang="en-US" sz="1300" dirty="0"/>
                     </a:p>
                   </a:txBody>
                   <a:tcPr marL="25400" marR="101600" marT="63500" marB="63500" anchor="ctr">
@@ -22059,14 +22211,14 @@
                         <a:buNone/>
                       </a:pPr>
                       <a:r>
-                        <a:rPr lang="en-US" sz="1400" dirty="0">
+                        <a:rPr lang="en-US" sz="1300" dirty="0">
                           <a:solidFill>
                             <a:schemeClr val="tx1"/>
                           </a:solidFill>
                         </a:rPr>
                         <a:t>Positive PCR may be colonisation</a:t>
                       </a:r>
-                      <a:endParaRPr lang="en-US" sz="1400" dirty="0"/>
+                      <a:endParaRPr lang="en-US" sz="1300" dirty="0"/>
                     </a:p>
                   </a:txBody>
                   <a:tcPr marL="25400" marR="101600" marT="63500" marB="63500" anchor="ctr">
@@ -22101,14 +22253,14 @@
                         <a:buNone/>
                       </a:pPr>
                       <a:r>
-                        <a:rPr lang="en-US" sz="1400" dirty="0">
+                        <a:rPr lang="en-US" sz="1300" dirty="0">
                           <a:solidFill>
                             <a:schemeClr val="tx1"/>
                           </a:solidFill>
                         </a:rPr>
                         <a:t>PJP: serum BDG</a:t>
                       </a:r>
-                      <a:endParaRPr lang="en-US" sz="1400" dirty="0"/>
+                      <a:endParaRPr lang="en-US" sz="1300" dirty="0"/>
                     </a:p>
                   </a:txBody>
                   <a:tcPr marL="25400" marR="101600" marT="63500" marB="63500" anchor="ctr">
@@ -22141,14 +22293,14 @@
                         <a:buNone/>
                       </a:pPr>
                       <a:r>
-                        <a:rPr lang="en-US" sz="1400" dirty="0">
+                        <a:rPr lang="en-US" sz="1300" dirty="0">
                           <a:solidFill>
                             <a:schemeClr val="tx1"/>
                           </a:solidFill>
                         </a:rPr>
                         <a:t>Supports the diagnosis</a:t>
                       </a:r>
-                      <a:endParaRPr lang="en-US" sz="1400" dirty="0"/>
+                      <a:endParaRPr lang="en-US" sz="1300" dirty="0"/>
                     </a:p>
                   </a:txBody>
                   <a:tcPr marL="25400" marR="101600" marT="63500" marB="63500" anchor="ctr">
@@ -22181,28 +22333,14 @@
                         <a:buNone/>
                       </a:pPr>
                       <a:r>
-                        <a:rPr lang="en-US" sz="1400" dirty="0">
-                          <a:solidFill>
-                            <a:schemeClr val="tx1"/>
-                          </a:solidFill>
-                        </a:rPr>
-                        <a:t>False negatives occur;</a:t>
-                      </a:r>
-                      <a:endParaRPr lang="en-US" sz="1400" dirty="0"/>
-                    </a:p>
-                    <a:p>
-                      <a:pPr indent="0" marL="0">
-                        <a:buNone/>
-                      </a:pPr>
-                      <a:r>
-                        <a:rPr lang="en-US" sz="1400" dirty="0">
-                          <a:solidFill>
-                            <a:schemeClr val="tx1"/>
-                          </a:solidFill>
-                        </a:rPr>
-                        <a:t>other fungi also positive</a:t>
-                      </a:r>
-                      <a:endParaRPr lang="en-US" sz="1400" dirty="0"/>
+                        <a:rPr lang="en-US" sz="1300" dirty="0">
+                          <a:solidFill>
+                            <a:schemeClr val="tx1"/>
+                          </a:solidFill>
+                        </a:rPr>
+                        <a:t>False negatives; other fungi also positive</a:t>
+                      </a:r>
+                      <a:endParaRPr lang="en-US" sz="1300" dirty="0"/>
                     </a:p>
                   </a:txBody>
                   <a:tcPr marL="25400" marR="101600" marT="63500" marB="63500" anchor="ctr">
@@ -24087,7 +24225,7 @@
                             <a:schemeClr val="tx1"/>
                           </a:solidFill>
                         </a:rPr>
-                        <a:t>Aerosolised L-AmB + fluconazole</a:t>
+                        <a:t>Liposomal AmB</a:t>
                       </a:r>
                       <a:endParaRPr lang="en-US" sz="1400" dirty="0"/>
                     </a:p>
@@ -24102,7 +24240,7 @@
                     <a:lnT w="0" cap="flat" cmpd="sng" algn="ctr">
                       <a:noFill/>
                     </a:lnT>
-                    <a:lnB w="6350" cap="flat" cmpd="sng" algn="ctr">
+                    <a:lnB w="19050" cap="flat" cmpd="sng" algn="ctr">
                       <a:solidFill>
                         <a:srgbClr val="000000"/>
                       </a:solidFill>
@@ -24127,7 +24265,21 @@
                             <a:schemeClr val="tx1"/>
                           </a:solidFill>
                         </a:rPr>
-                        <a:t>—</a:t>
+                        <a:t>Aerosolised, added to fluconazole;</a:t>
+                      </a:r>
+                      <a:endParaRPr lang="en-US" sz="1400" dirty="0"/>
+                    </a:p>
+                    <a:p>
+                      <a:pPr indent="0" marL="0">
+                        <a:buNone/>
+                      </a:pPr>
+                      <a:r>
+                        <a:rPr lang="en-US" sz="1400" dirty="0">
+                          <a:solidFill>
+                            <a:schemeClr val="tx1"/>
+                          </a:solidFill>
+                        </a:rPr>
+                        <a:t>or IV</a:t>
                       </a:r>
                       <a:endParaRPr lang="en-US" sz="1400" dirty="0"/>
                     </a:p>
@@ -24142,7 +24294,7 @@
                     <a:lnT w="0" cap="flat" cmpd="sng" algn="ctr">
                       <a:noFill/>
                     </a:lnT>
-                    <a:lnB w="6350" cap="flat" cmpd="sng" algn="ctr">
+                    <a:lnB w="19050" cap="flat" cmpd="sng" algn="ctr">
                       <a:solidFill>
                         <a:srgbClr val="000000"/>
                       </a:solidFill>
@@ -24167,7 +24319,7 @@
                             <a:schemeClr val="tx1"/>
                           </a:solidFill>
                         </a:rPr>
-                        <a:t>Not for low-incidence centres;</a:t>
+                        <a:t>Aerosol: B-II in higher-risk centres</a:t>
                       </a:r>
                       <a:endParaRPr lang="en-US" sz="1400" dirty="0"/>
                     </a:p>
@@ -24181,129 +24333,7 @@
                             <a:schemeClr val="tx1"/>
                           </a:solidFill>
                         </a:rPr>
-                        <a:t>B-II in higher-risk centres</a:t>
-                      </a:r>
-                      <a:endParaRPr lang="en-US" sz="1400" dirty="0"/>
-                    </a:p>
-                  </a:txBody>
-                  <a:tcPr marL="25400" marR="101600" marT="63500" marB="63500" anchor="ctr">
-                    <a:lnL w="0" cap="flat" cmpd="sng" algn="ctr">
-                      <a:noFill/>
-                    </a:lnL>
-                    <a:lnR w="0" cap="flat" cmpd="sng" algn="ctr">
-                      <a:noFill/>
-                    </a:lnR>
-                    <a:lnT w="0" cap="flat" cmpd="sng" algn="ctr">
-                      <a:noFill/>
-                    </a:lnT>
-                    <a:lnB w="6350" cap="flat" cmpd="sng" algn="ctr">
-                      <a:solidFill>
-                        <a:srgbClr val="000000"/>
-                      </a:solidFill>
-                      <a:prstDash val="solid"/>
-                      <a:round/>
-                      <a:headEnd type="none" w="med" len="med"/>
-                      <a:tailEnd type="none" w="med" len="med"/>
-                    </a:lnB>
-                  </a:tcPr>
-                </a:tc>
-              </a:tr>
-              <a:tr h="0">
-                <a:tc>
-                  <a:txBody>
-                    <a:bodyPr/>
-                    <a:lstStyle/>
-                    <a:p>
-                      <a:pPr indent="0" marL="0">
-                        <a:buNone/>
-                      </a:pPr>
-                      <a:r>
-                        <a:rPr lang="en-US" sz="1400" dirty="0">
-                          <a:solidFill>
-                            <a:schemeClr val="tx1"/>
-                          </a:solidFill>
-                        </a:rPr>
-                        <a:t>IV liposomal AmB</a:t>
-                      </a:r>
-                      <a:endParaRPr lang="en-US" sz="1400" dirty="0"/>
-                    </a:p>
-                  </a:txBody>
-                  <a:tcPr marL="25400" marR="101600" marT="63500" marB="63500" anchor="ctr">
-                    <a:lnL w="0" cap="flat" cmpd="sng" algn="ctr">
-                      <a:noFill/>
-                    </a:lnL>
-                    <a:lnR w="0" cap="flat" cmpd="sng" algn="ctr">
-                      <a:noFill/>
-                    </a:lnR>
-                    <a:lnT w="0" cap="flat" cmpd="sng" algn="ctr">
-                      <a:noFill/>
-                    </a:lnT>
-                    <a:lnB w="19050" cap="flat" cmpd="sng" algn="ctr">
-                      <a:solidFill>
-                        <a:srgbClr val="000000"/>
-                      </a:solidFill>
-                      <a:prstDash val="solid"/>
-                      <a:round/>
-                      <a:headEnd type="none" w="med" len="med"/>
-                      <a:tailEnd type="none" w="med" len="med"/>
-                    </a:lnB>
-                  </a:tcPr>
-                </a:tc>
-                <a:tc>
-                  <a:txBody>
-                    <a:bodyPr/>
-                    <a:lstStyle/>
-                    <a:p>
-                      <a:pPr indent="0" marL="0">
-                        <a:buNone/>
-                      </a:pPr>
-                      <a:r>
-                        <a:rPr lang="en-US" sz="1400" dirty="0">
-                          <a:solidFill>
-                            <a:schemeClr val="tx1"/>
-                          </a:solidFill>
-                        </a:rPr>
-                        <a:t>—</a:t>
-                      </a:r>
-                      <a:endParaRPr lang="en-US" sz="1400" dirty="0"/>
-                    </a:p>
-                  </a:txBody>
-                  <a:tcPr marL="25400" marR="101600" marT="63500" marB="63500" anchor="ctr">
-                    <a:lnL w="0" cap="flat" cmpd="sng" algn="ctr">
-                      <a:noFill/>
-                    </a:lnL>
-                    <a:lnR w="0" cap="flat" cmpd="sng" algn="ctr">
-                      <a:noFill/>
-                    </a:lnR>
-                    <a:lnT w="0" cap="flat" cmpd="sng" algn="ctr">
-                      <a:noFill/>
-                    </a:lnT>
-                    <a:lnB w="19050" cap="flat" cmpd="sng" algn="ctr">
-                      <a:solidFill>
-                        <a:srgbClr val="000000"/>
-                      </a:solidFill>
-                      <a:prstDash val="solid"/>
-                      <a:round/>
-                      <a:headEnd type="none" w="med" len="med"/>
-                      <a:tailEnd type="none" w="med" len="med"/>
-                    </a:lnB>
-                  </a:tcPr>
-                </a:tc>
-                <a:tc>
-                  <a:txBody>
-                    <a:bodyPr/>
-                    <a:lstStyle/>
-                    <a:p>
-                      <a:pPr indent="0" marL="0">
-                        <a:buNone/>
-                      </a:pPr>
-                      <a:r>
-                        <a:rPr lang="en-US" sz="1400" dirty="0">
-                          <a:solidFill>
-                            <a:schemeClr val="tx1"/>
-                          </a:solidFill>
-                        </a:rPr>
-                        <a:t>C-II</a:t>
+                        <a:t>only; IV: C-II</a:t>
                       </a:r>
                       <a:endParaRPr lang="en-US" sz="1400" dirty="0"/>
                     </a:p>

--- a/slides/decks/s11-invasive-fungal.pptx
+++ b/slides/decks/s11-invasive-fungal.pptx
@@ -32,10 +32,9 @@
     <p:sldId id="280" r:id="rId26"/>
     <p:sldId id="281" r:id="rId27"/>
     <p:sldId id="282" r:id="rId28"/>
-    <p:sldId id="283" r:id="rId29"/>
   </p:sldIdLst>
   <p:notesMasterIdLst>
-    <p:notesMasterId r:id="rId30"/>
+    <p:notesMasterId r:id="rId29"/>
   </p:notesMasterIdLst>
   <p:sldSz cx="12192000" cy="6858000"/>
   <p:notesSz cx="6858000" cy="12192000"/>
@@ -134,19 +133,19 @@
   <p:extLst>
     <p:ext uri="{521415D9-36F7-43E2-AB2F-B90AF26B5E84}">
       <p14:sectionLst xmlns:p14="http://schemas.microsoft.com/office/powerpoint/2010/main">
-        <p14:section name="Opening" id="{50f1baf0-aa58-2af2-cbbc-4d85dbd7d487}">
+        <p14:section name="Opening" id="{c1de1768-8dc6-8854-ff6b-4f271538ee8f}">
           <p14:sldIdLst>
             <p14:sldId id="256"/>
             <p14:sldId id="257"/>
           </p14:sldIdLst>
         </p14:section>
-        <p14:section name="Epidemiology and risk" id="{0d69ee49-a3b6-365a-2c5a-9e24a6e1ab24}">
+        <p14:section name="Epidemiology and risk" id="{c7286869-9f23-2cc3-25af-4d968dd99b7e}">
           <p14:sldIdLst>
             <p14:sldId id="258"/>
             <p14:sldId id="259"/>
           </p14:sldIdLst>
         </p14:section>
-        <p14:section name="Diagnosis" id="{61f26891-3aa5-d1cf-fbb7-1a49196cd3a1}">
+        <p14:section name="Diagnosis" id="{4547cec5-bb8a-cd50-2876-4783bbefcf78}">
           <p14:sldIdLst>
             <p14:sldId id="260"/>
             <p14:sldId id="261"/>
@@ -154,13 +153,13 @@
             <p14:sldId id="263"/>
           </p14:sldIdLst>
         </p14:section>
-        <p14:section name="Prophylaxis" id="{8c3620f3-3621-516f-7674-4841db47a3a8}">
+        <p14:section name="Prophylaxis" id="{bb9bf1b0-9e0b-74d6-748d-41c45640c643}">
           <p14:sldIdLst>
             <p14:sldId id="264"/>
             <p14:sldId id="265"/>
           </p14:sldIdLst>
         </p14:section>
-        <p14:section name="Treatment" id="{df3c4962-0a14-f370-1f72-7e9caf30d78f}">
+        <p14:section name="Treatment" id="{1555ed0a-4d21-346e-9643-a2b13b80d4bb}">
           <p14:sldIdLst>
             <p14:sldId id="266"/>
             <p14:sldId id="267"/>
@@ -170,7 +169,7 @@
             <p14:sldId id="271"/>
           </p14:sldIdLst>
         </p14:section>
-        <p14:section name="Board questions" id="{3cb4aa71-1c79-7a19-d88b-246a99e4ab90}">
+        <p14:section name="Board questions" id="{09b2fe93-cc94-baec-895d-89f4d5e18686}">
           <p14:sldIdLst>
             <p14:sldId id="272"/>
             <p14:sldId id="273"/>
@@ -180,18 +179,17 @@
             <p14:sldId id="277"/>
           </p14:sldIdLst>
         </p14:section>
-        <p14:section name="References" id="{711679eb-e27f-7015-0a82-8db232a513eb}">
+        <p14:section name="References" id="{f17a8d1a-6c82-544d-e5d7-09e0d8406fd4}">
           <p14:sldIdLst>
             <p14:sldId id="278"/>
             <p14:sldId id="279"/>
-            <p14:sldId id="280"/>
           </p14:sldIdLst>
         </p14:section>
-        <p14:section name="Backup" id="{f821d6f1-52d7-b997-04dc-54a6889666ae}">
+        <p14:section name="Backup" id="{26c0886c-3130-d8d9-10ea-6faafbb314a9}">
           <p14:sldIdLst>
+            <p14:sldId id="280"/>
             <p14:sldId id="281"/>
             <p14:sldId id="282"/>
-            <p14:sldId id="283"/>
           </p14:sldIdLst>
         </p14:section>
       </p14:sectionLst>
@@ -2878,11 +2876,26 @@
           <a:bodyPr/>
           <a:lstStyle/>
           <a:p>
+            <a:pPr>
+              <a:spcAft>
+                <a:spcPts val="600"/>
+              </a:spcAft>
+            </a:pPr>
             <a:r>
               <a:rPr lang="en-US" dirty="0"/>
-              <a:t>各頁頁尾短式引用的完整文獻，不講。</a:t>
-            </a:r>
-            <a:endParaRPr lang="en-US" dirty="0"/>
+              <a:t>這是 Table 37.2 中 voriconazole、isavuconazole 以外的部分。Aspergillosis 用 liposomal amphotericin B 3 mg/kg 是 B-I，mucormycosis 則是 5 mg/kg，B-II。</a:t>
+            </a:r>
+          </a:p>
+          <a:p>
+            <a:pPr>
+              <a:spcAft>
+                <a:spcPts val="600"/>
+              </a:spcAft>
+            </a:pPr>
+            <a:r>
+              <a:rPr lang="en-US" dirty="0"/>
+              <a:t>Posaconazole 治療 aspergillosis 是 2021 年試驗之後才加入的，所以不在 ECIL-6 表內。</a:t>
+            </a:r>
           </a:p>
         </p:txBody>
       </p:sp>
@@ -2966,26 +2979,11 @@
           <a:bodyPr/>
           <a:lstStyle/>
           <a:p>
-            <a:pPr>
-              <a:spcAft>
-                <a:spcPts val="600"/>
-              </a:spcAft>
-            </a:pPr>
             <a:r>
               <a:rPr lang="en-US" dirty="0"/>
-              <a:t>這是 Table 37.2 中 voriconazole、isavuconazole 以外的部分。Aspergillosis 用 liposomal amphotericin B 3 mg/kg 是 B-I，mucormycosis 則是 5 mg/kg，B-II。</a:t>
-            </a:r>
-          </a:p>
-          <a:p>
-            <a:pPr>
-              <a:spcAft>
-                <a:spcPts val="600"/>
-              </a:spcAft>
-            </a:pPr>
-            <a:r>
-              <a:rPr lang="en-US" dirty="0"/>
-              <a:t>Posaconazole 治療 aspergillosis 是 2021 年試驗之後才加入的，所以不在 ECIL-6 表內。</a:t>
-            </a:r>
+              <a:t>這張補充 pre-engraftment 預防各藥等級背後的試驗。Voriconazole 對 itraconazole 的優勢來自能用得比較久，不是效果較好；micafungin 的試驗低風險病人太多，所以高 mould 中心只給 C-I。</a:t>
+            </a:r>
+            <a:endParaRPr lang="en-US" dirty="0"/>
           </a:p>
         </p:txBody>
       </p:sp>
@@ -3071,7 +3069,7 @@
           <a:p>
             <a:r>
               <a:rPr lang="en-US" dirty="0"/>
-              <a:t>這張補充 pre-engraftment 預防各藥等級背後的試驗。Voriconazole 對 itraconazole 的優勢來自能用得比較久，不是效果較好；micafungin 的試驗低風險病人太多，所以高 mould 中心只給 C-I。</a:t>
+              <a:t>書上 key point 列出三個新藥。Rezafungin 是長效 echinocandin，研究用在預防；olorofim 用於治療選擇有限的 mould，但不含 Mucorales；opelconazole 是吸入型 azole，當 salvage 的輔助。</a:t>
             </a:r>
             <a:endParaRPr lang="en-US" dirty="0"/>
           </a:p>
@@ -3095,94 +3093,6 @@
             <a:fld id="{F7021451-1387-4CA6-816F-3879F97B5CBC}" type="slidenum">
               <a:rPr lang="en-US"/>
               <a:t>27</a:t>
-            </a:fld>
-            <a:endParaRPr lang="en-US"/>
-          </a:p>
-        </p:txBody>
-      </p:sp>
-    </p:spTree>
-    <p:extLst>
-      <p:ext uri="{BB962C8B-B14F-4D97-AF65-F5344CB8AC3E}">
-        <p14:creationId xmlns:p14="http://schemas.microsoft.com/office/powerpoint/2010/main" val="1024086991"/>
-      </p:ext>
-    </p:extLst>
-  </p:cSld>
-  <p:clrMapOvr>
-    <a:masterClrMapping/>
-  </p:clrMapOvr>
-</p:notes>
-</file>
-
-<file path=ppt/notesSlides/notesSlide28.xml><?xml version="1.0" encoding="utf-8"?>
-<p:notes xmlns:a="http://schemas.openxmlformats.org/drawingml/2006/main" xmlns:r="http://schemas.openxmlformats.org/officeDocument/2006/relationships" xmlns:p="http://schemas.openxmlformats.org/presentationml/2006/main">
-  <p:cSld>
-    <p:spTree>
-      <p:nvGrpSpPr>
-        <p:cNvPr id="1" name=""/>
-        <p:cNvGrpSpPr/>
-        <p:nvPr/>
-      </p:nvGrpSpPr>
-      <p:grpSpPr>
-        <a:xfrm>
-          <a:off x="0" y="0"/>
-          <a:ext cx="0" cy="0"/>
-          <a:chOff x="0" y="0"/>
-          <a:chExt cx="0" cy="0"/>
-        </a:xfrm>
-      </p:grpSpPr>
-      <p:sp>
-        <p:nvSpPr>
-          <p:cNvPr id="2" name="Slide Image Placeholder 1"/>
-          <p:cNvSpPr>
-            <a:spLocks noGrp="1" noRot="1" noChangeAspect="1"/>
-          </p:cNvSpPr>
-          <p:nvPr>
-            <p:ph type="sldImg"/>
-          </p:nvPr>
-        </p:nvSpPr>
-        <p:spPr/>
-      </p:sp>
-      <p:sp>
-        <p:nvSpPr>
-          <p:cNvPr id="3" name="Notes Placeholder 2"/>
-          <p:cNvSpPr>
-            <a:spLocks noGrp="1"/>
-          </p:cNvSpPr>
-          <p:nvPr>
-            <p:ph type="body" idx="1"/>
-          </p:nvPr>
-        </p:nvSpPr>
-        <p:spPr/>
-        <p:txBody>
-          <a:bodyPr/>
-          <a:lstStyle/>
-          <a:p>
-            <a:r>
-              <a:rPr lang="en-US" dirty="0"/>
-              <a:t>書上 key point 列出三個新藥。Rezafungin 是長效 echinocandin，研究用在預防；olorofim 用於治療選擇有限的 mould，但不含 Mucorales；opelconazole 是吸入型 azole，當 salvage 的輔助。</a:t>
-            </a:r>
-            <a:endParaRPr lang="en-US" dirty="0"/>
-          </a:p>
-        </p:txBody>
-      </p:sp>
-      <p:sp>
-        <p:nvSpPr>
-          <p:cNvPr id="4" name="Slide Number Placeholder 3"/>
-          <p:cNvSpPr>
-            <a:spLocks noGrp="1"/>
-          </p:cNvSpPr>
-          <p:nvPr>
-            <p:ph type="sldNum" sz="quarter" idx="10"/>
-          </p:nvPr>
-        </p:nvSpPr>
-        <p:spPr/>
-        <p:txBody>
-          <a:bodyPr/>
-          <a:lstStyle/>
-          <a:p>
-            <a:fld id="{F7021451-1387-4CA6-816F-3879F97B5CBC}" type="slidenum">
-              <a:rPr lang="en-US"/>
-              <a:t>28</a:t>
             </a:fld>
             <a:endParaRPr lang="en-US"/>
           </a:p>
@@ -14417,7 +14327,7 @@
                   <a:schemeClr val="tx1"/>
                 </a:solidFill>
               </a:rPr>
-              <a:t>References, part 1 of 3</a:t>
+              <a:t>References, part 1 of 2</a:t>
             </a:r>
             <a:endParaRPr lang="en-US" sz="3600" dirty="0"/>
           </a:p>
@@ -14739,7 +14649,7 @@
                   <a:schemeClr val="tx1"/>
                 </a:solidFill>
               </a:rPr>
-              <a:t>References, part 2 of 3</a:t>
+              <a:t>References, part 2 of 2</a:t>
             </a:r>
             <a:endParaRPr lang="en-US" sz="3600" dirty="0"/>
           </a:p>
@@ -14869,23 +14779,6 @@
                 </a:solidFill>
               </a:rPr>
               <a:t>11. Slavin MA, Chen YC, Cordonnier C, et al. When to change treatment of acute invasive aspergillosis: an expert viewpoint. J Antimicrob Chemother. 2021;77(1):16–23.</a:t>
-            </a:r>
-            <a:endParaRPr lang="en-US" sz="1100" dirty="0"/>
-          </a:p>
-          <a:p>
-            <a:pPr indent="0" marL="0">
-              <a:spcAft>
-                <a:spcPts val="700"/>
-              </a:spcAft>
-              <a:buNone/>
-            </a:pPr>
-            <a:r>
-              <a:rPr lang="en-US" sz="1100" dirty="0">
-                <a:solidFill>
-                  <a:schemeClr val="tx1"/>
-                </a:solidFill>
-              </a:rPr>
-              <a:t>12. Andes DR, Safdar N, Baddley JW, et al. Impact of treatment strategy on outcomes in patients with candidemia and other forms of invasive candidiasis: a patient-level quantitative review of randomized trials. Clin Infect Dis. 2012;54:1110–22.</a:t>
             </a:r>
             <a:endParaRPr lang="en-US" sz="1100" dirty="0"/>
           </a:p>
@@ -15023,7 +14916,7 @@
                   <a:schemeClr val="tx1"/>
                 </a:solidFill>
               </a:rPr>
-              <a:t>REFERENCES</a:t>
+              <a:t>BACKUP · TABLE 37.2</a:t>
             </a:r>
             <a:endParaRPr lang="en-US" sz="1100" dirty="0"/>
           </a:p>
@@ -15061,7 +14954,7 @@
                   <a:schemeClr val="tx1"/>
                 </a:solidFill>
               </a:rPr>
-              <a:t>References, part 3 of 3</a:t>
+              <a:t>ECIL-6 grades the polyenes and second-line options for both moulds</a:t>
             </a:r>
             <a:endParaRPr lang="en-US" sz="3600" dirty="0"/>
           </a:p>
@@ -15069,46 +14962,7 @@
       </p:sp>
       <p:sp>
         <p:nvSpPr>
-          <p:cNvPr id="5" name="Text 83"/>
-          <p:cNvSpPr txBox="1"/>
-          <p:nvPr/>
-        </p:nvSpPr>
-        <p:spPr>
-          <a:xfrm>
-            <a:off x="685800" y="2103120"/>
-            <a:ext cx="5120640" cy="3886200"/>
-          </a:xfrm>
-          <a:prstGeom prst="rect">
-            <a:avLst/>
-          </a:prstGeom>
-          <a:noFill/>
-          <a:ln/>
-        </p:spPr>
-        <p:txBody>
-          <a:bodyPr wrap="square" lIns="0" tIns="0" rIns="0" bIns="0" rtlCol="0" anchor="t"/>
-          <a:lstStyle/>
-          <a:p>
-            <a:pPr indent="0" marL="0">
-              <a:spcAft>
-                <a:spcPts val="700"/>
-              </a:spcAft>
-              <a:buNone/>
-            </a:pPr>
-            <a:r>
-              <a:rPr lang="en-US" sz="1100" dirty="0">
-                <a:solidFill>
-                  <a:schemeClr val="tx1"/>
-                </a:solidFill>
-              </a:rPr>
-              <a:t>13. Maschmeyer G, Helweg-Larsen J, Pagano L, et al. ECIL guidelines for treatment of pneumocystis jirovecii pneumonia in non-HIV-infected haematology patients. J Antimicrob Chemother. 2016;71:2405–13.</a:t>
-            </a:r>
-            <a:endParaRPr lang="en-US" sz="1100" dirty="0"/>
-          </a:p>
-        </p:txBody>
-      </p:sp>
-      <p:sp>
-        <p:nvSpPr>
-          <p:cNvPr id="6" name="Text 0"/>
+          <p:cNvPr id="4" name="Text 0"/>
           <p:cNvSpPr/>
           <p:nvPr>
             <p:ph idx="102" type="body" hasCustomPrompt="1"/>
@@ -15132,182 +14986,6 @@
             <a:pPr algn="l" indent="0" marL="0">
               <a:buNone/>
             </a:pPr>
-            <a:endParaRPr lang="en-US" sz="1000" dirty="0"/>
-          </a:p>
-        </p:txBody>
-      </p:sp>
-      <p:sp>
-        <p:nvSpPr>
-          <p:cNvPr id="25" name="Slide Number Placeholder 0"/>
-          <p:cNvSpPr>
-            <a:spLocks noGrp="1"/>
-          </p:cNvSpPr>
-          <p:nvPr>
-            <p:ph type="sldNum" sz="quarter" idx="4294967295"/>
-          </p:nvPr>
-        </p:nvSpPr>
-        <p:spPr>
-          <a:xfrm>
-            <a:off x="10972800" y="6080760"/>
-            <a:ext cx="530352" cy="274320"/>
-          </a:xfrm>
-          <a:prstGeom prst="rect">
-            <a:avLst/>
-          </a:prstGeom>
-          <a:extLst>
-            <a:ext uri="{C572A759-6A51-4108-AA02-DFA0A04FC94B}">
-              <ma14:wrappingTextBoxFlag xmlns:ma14="http://schemas.microsoft.com/office/mac/drawingml/2011/main" val="0"/>
-            </a:ext>
-          </a:extLst>
-        </p:spPr>
-        <p:txBody>
-          <a:bodyPr/>
-          <a:lstStyle>
-            <a:lvl1pPr>
-              <a:defRPr sz="1000">
-                <a:solidFill>
-                  <a:schemeClr val="tx1"/>
-                </a:solidFill>
-              </a:defRPr>
-            </a:lvl1pPr>
-          </a:lstStyle>
-          <a:p>
-            <a:pPr algn="r"/>
-            <a:fld id="{F7021451-1387-4CA6-816F-3879F97B5CBC}" type="slidenum">
-              <a:rPr b="0" lang="en-US"/>
-              <a:t>25</a:t>
-            </a:fld>
-            <a:endParaRPr lang="en-US"/>
-          </a:p>
-        </p:txBody>
-      </p:sp>
-    </p:spTree>
-  </p:cSld>
-  <p:clrMapOvr>
-    <a:masterClrMapping/>
-  </p:clrMapOvr>
-</p:sld>
-</file>
-
-<file path=ppt/slides/slide26.xml><?xml version="1.0" encoding="utf-8"?>
-<p:sld xmlns:a="http://schemas.openxmlformats.org/drawingml/2006/main" xmlns:r="http://schemas.openxmlformats.org/officeDocument/2006/relationships" xmlns:p="http://schemas.openxmlformats.org/presentationml/2006/main">
-  <p:cSld name="Slide 26">
-    <p:spTree>
-      <p:nvGrpSpPr>
-        <p:cNvPr id="1" name=""/>
-        <p:cNvGrpSpPr/>
-        <p:nvPr/>
-      </p:nvGrpSpPr>
-      <p:grpSpPr>
-        <a:xfrm>
-          <a:off x="0" y="0"/>
-          <a:ext cx="0" cy="0"/>
-          <a:chOff x="0" y="0"/>
-          <a:chExt cx="0" cy="0"/>
-        </a:xfrm>
-      </p:grpSpPr>
-      <p:sp>
-        <p:nvSpPr>
-          <p:cNvPr id="2" name="Text 0"/>
-          <p:cNvSpPr/>
-          <p:nvPr>
-            <p:ph idx="100" type="body" hasCustomPrompt="1"/>
-          </p:nvPr>
-        </p:nvSpPr>
-        <p:spPr>
-          <a:xfrm>
-            <a:off x="685800" y="502920"/>
-            <a:ext cx="10817352" cy="274320"/>
-          </a:xfrm>
-          <a:prstGeom prst="rect">
-            <a:avLst/>
-          </a:prstGeom>
-          <a:noFill/>
-          <a:ln/>
-        </p:spPr>
-        <p:txBody>
-          <a:bodyPr wrap="square" lIns="0" tIns="0" rIns="0" bIns="0" rtlCol="0" anchor="t"/>
-          <a:lstStyle/>
-          <a:p>
-            <a:pPr algn="l" indent="0" marL="0">
-              <a:buNone/>
-            </a:pPr>
-            <a:r>
-              <a:rPr lang="en-US" sz="1100" spc="300" kern="0" dirty="0">
-                <a:solidFill>
-                  <a:schemeClr val="tx1"/>
-                </a:solidFill>
-              </a:rPr>
-              <a:t>BACKUP · TABLE 37.2</a:t>
-            </a:r>
-            <a:endParaRPr lang="en-US" sz="1100" dirty="0"/>
-          </a:p>
-        </p:txBody>
-      </p:sp>
-      <p:sp>
-        <p:nvSpPr>
-          <p:cNvPr id="3" name="Text 0"/>
-          <p:cNvSpPr/>
-          <p:nvPr>
-            <p:ph idx="101" type="title" hasCustomPrompt="1"/>
-          </p:nvPr>
-        </p:nvSpPr>
-        <p:spPr>
-          <a:xfrm>
-            <a:off x="685800" y="822960"/>
-            <a:ext cx="10817352" cy="1143000"/>
-          </a:xfrm>
-          <a:prstGeom prst="rect">
-            <a:avLst/>
-          </a:prstGeom>
-          <a:noFill/>
-          <a:ln/>
-        </p:spPr>
-        <p:txBody>
-          <a:bodyPr wrap="square" lIns="0" tIns="0" rIns="0" bIns="0" rtlCol="0" anchor="t"/>
-          <a:lstStyle/>
-          <a:p>
-            <a:pPr algn="l" indent="0" marL="0">
-              <a:buNone/>
-            </a:pPr>
-            <a:r>
-              <a:rPr lang="en-US" sz="3600" b="1" dirty="0">
-                <a:solidFill>
-                  <a:schemeClr val="tx1"/>
-                </a:solidFill>
-              </a:rPr>
-              <a:t>ECIL-6 grades the polyenes and second-line options for both moulds</a:t>
-            </a:r>
-            <a:endParaRPr lang="en-US" sz="3600" dirty="0"/>
-          </a:p>
-        </p:txBody>
-      </p:sp>
-      <p:sp>
-        <p:nvSpPr>
-          <p:cNvPr id="4" name="Text 0"/>
-          <p:cNvSpPr/>
-          <p:nvPr>
-            <p:ph idx="102" type="body" hasCustomPrompt="1"/>
-          </p:nvPr>
-        </p:nvSpPr>
-        <p:spPr>
-          <a:xfrm>
-            <a:off x="685800" y="6080760"/>
-            <a:ext cx="9966960" cy="457200"/>
-          </a:xfrm>
-          <a:prstGeom prst="rect">
-            <a:avLst/>
-          </a:prstGeom>
-          <a:noFill/>
-          <a:ln/>
-        </p:spPr>
-        <p:txBody>
-          <a:bodyPr wrap="square" lIns="0" tIns="0" rIns="0" bIns="0" rtlCol="0" anchor="t"/>
-          <a:lstStyle/>
-          <a:p>
-            <a:pPr algn="l" indent="0" marL="0">
-              <a:buNone/>
-            </a:pPr>
             <a:r>
               <a:rPr lang="en-US" sz="1000" dirty="0">
                 <a:solidFill>
@@ -15322,7 +15000,7 @@
       </p:sp>
       <p:graphicFrame>
         <p:nvGraphicFramePr>
-          <p:cNvPr id="27" name="Table 84"/>
+          <p:cNvPr id="26" name="Table 83"/>
           <p:cNvGraphicFramePr>
             <a:graphicFrameLocks noGrp="1"/>
           </p:cNvGraphicFramePr>
@@ -16440,7 +16118,7 @@
             <a:pPr algn="r"/>
             <a:fld id="{F7021451-1387-4CA6-816F-3879F97B5CBC}" type="slidenum">
               <a:rPr b="0" lang="en-US"/>
-              <a:t>26</a:t>
+              <a:t>25</a:t>
             </a:fld>
             <a:endParaRPr lang="en-US"/>
           </a:p>
@@ -16454,9 +16132,9 @@
 </p:sld>
 </file>
 
-<file path=ppt/slides/slide27.xml><?xml version="1.0" encoding="utf-8"?>
+<file path=ppt/slides/slide26.xml><?xml version="1.0" encoding="utf-8"?>
 <p:sld xmlns:a="http://schemas.openxmlformats.org/drawingml/2006/main" xmlns:r="http://schemas.openxmlformats.org/officeDocument/2006/relationships" xmlns:p="http://schemas.openxmlformats.org/presentationml/2006/main">
-  <p:cSld name="Slide 27">
+  <p:cSld name="Slide 26">
     <p:spTree>
       <p:nvGrpSpPr>
         <p:cNvPr id="1" name=""/>
@@ -16587,7 +16265,7 @@
       </p:sp>
       <p:graphicFrame>
         <p:nvGraphicFramePr>
-          <p:cNvPr id="28" name="Table 85"/>
+          <p:cNvPr id="27" name="Table 84"/>
           <p:cNvGraphicFramePr>
             <a:graphicFrameLocks noGrp="1"/>
           </p:cNvGraphicFramePr>
@@ -17215,7 +16893,7 @@
                             <a:schemeClr val="tx1"/>
                           </a:solidFill>
                         </a:rPr>
-                        <a:t>Favoured micafungin</a:t>
+                        <a:t>Significant design shortcomings</a:t>
                       </a:r>
                       <a:endParaRPr lang="en-US" sz="1500" dirty="0"/>
                     </a:p>
@@ -17461,7 +17139,7 @@
             <a:pPr algn="r"/>
             <a:fld id="{F7021451-1387-4CA6-816F-3879F97B5CBC}" type="slidenum">
               <a:rPr b="0" lang="en-US"/>
-              <a:t>27</a:t>
+              <a:t>26</a:t>
             </a:fld>
             <a:endParaRPr lang="en-US"/>
           </a:p>
@@ -17475,9 +17153,9 @@
 </p:sld>
 </file>
 
-<file path=ppt/slides/slide28.xml><?xml version="1.0" encoding="utf-8"?>
+<file path=ppt/slides/slide27.xml><?xml version="1.0" encoding="utf-8"?>
 <p:sld xmlns:a="http://schemas.openxmlformats.org/drawingml/2006/main" xmlns:r="http://schemas.openxmlformats.org/officeDocument/2006/relationships" xmlns:p="http://schemas.openxmlformats.org/presentationml/2006/main">
-  <p:cSld name="Slide 28">
+  <p:cSld name="Slide 27">
     <p:spTree>
       <p:nvGrpSpPr>
         <p:cNvPr id="1" name=""/>
@@ -17608,7 +17286,7 @@
       </p:sp>
       <p:sp>
         <p:nvSpPr>
-          <p:cNvPr id="6" name="Text 86"/>
+          <p:cNvPr id="6" name="Text 85"/>
           <p:cNvSpPr txBox="1"/>
           <p:nvPr/>
         </p:nvSpPr>
@@ -17757,7 +17435,7 @@
             <a:pPr algn="r"/>
             <a:fld id="{F7021451-1387-4CA6-816F-3879F97B5CBC}" type="slidenum">
               <a:rPr b="0" lang="en-US"/>
-              <a:t>28</a:t>
+              <a:t>27</a:t>
             </a:fld>
             <a:endParaRPr lang="en-US"/>
           </a:p>

--- a/slides/decks/s11-invasive-fungal.pptx
+++ b/slides/decks/s11-invasive-fungal.pptx
@@ -133,19 +133,19 @@
   <p:extLst>
     <p:ext uri="{521415D9-36F7-43E2-AB2F-B90AF26B5E84}">
       <p14:sectionLst xmlns:p14="http://schemas.microsoft.com/office/powerpoint/2010/main">
-        <p14:section name="Opening" id="{c1de1768-8dc6-8854-ff6b-4f271538ee8f}">
+        <p14:section name="Opening" id="{f35dd1f8-cc2e-4794-4bd0-c0108871786d}">
           <p14:sldIdLst>
             <p14:sldId id="256"/>
             <p14:sldId id="257"/>
           </p14:sldIdLst>
         </p14:section>
-        <p14:section name="Epidemiology and risk" id="{c7286869-9f23-2cc3-25af-4d968dd99b7e}">
+        <p14:section name="Epidemiology and risk" id="{45b4688f-4fc0-ea29-cc12-dc4f7b86d02a}">
           <p14:sldIdLst>
             <p14:sldId id="258"/>
             <p14:sldId id="259"/>
           </p14:sldIdLst>
         </p14:section>
-        <p14:section name="Diagnosis" id="{4547cec5-bb8a-cd50-2876-4783bbefcf78}">
+        <p14:section name="Diagnosis" id="{4b002305-11ee-4b4e-43f9-d7a45d4e8623}">
           <p14:sldIdLst>
             <p14:sldId id="260"/>
             <p14:sldId id="261"/>
@@ -153,13 +153,13 @@
             <p14:sldId id="263"/>
           </p14:sldIdLst>
         </p14:section>
-        <p14:section name="Prophylaxis" id="{bb9bf1b0-9e0b-74d6-748d-41c45640c643}">
+        <p14:section name="Prophylaxis" id="{b3d40225-e602-dee9-c9a9-f95bdff6f27e}">
           <p14:sldIdLst>
             <p14:sldId id="264"/>
             <p14:sldId id="265"/>
           </p14:sldIdLst>
         </p14:section>
-        <p14:section name="Treatment" id="{1555ed0a-4d21-346e-9643-a2b13b80d4bb}">
+        <p14:section name="Treatment" id="{d612d071-8945-2ad8-9427-32b6c6e37fb1}">
           <p14:sldIdLst>
             <p14:sldId id="266"/>
             <p14:sldId id="267"/>
@@ -169,7 +169,7 @@
             <p14:sldId id="271"/>
           </p14:sldIdLst>
         </p14:section>
-        <p14:section name="Board questions" id="{09b2fe93-cc94-baec-895d-89f4d5e18686}">
+        <p14:section name="Board questions" id="{d6eb5a2b-dc20-7140-8c54-0aac91df4198}">
           <p14:sldIdLst>
             <p14:sldId id="272"/>
             <p14:sldId id="273"/>
@@ -179,13 +179,13 @@
             <p14:sldId id="277"/>
           </p14:sldIdLst>
         </p14:section>
-        <p14:section name="References" id="{f17a8d1a-6c82-544d-e5d7-09e0d8406fd4}">
+        <p14:section name="References" id="{cdba4136-66ba-7641-9eb5-9fa79348362a}">
           <p14:sldIdLst>
             <p14:sldId id="278"/>
             <p14:sldId id="279"/>
           </p14:sldIdLst>
         </p14:section>
-        <p14:section name="Backup" id="{26c0886c-3130-d8d9-10ea-6faafbb314a9}">
+        <p14:section name="Backup" id="{83a0fbdc-1678-8273-785a-a6d8ba28bee0}">
           <p14:sldIdLst>
             <p14:sldId id="280"/>
             <p14:sldId id="281"/>
